--- a/downloads/templates/Template_Performance_Readout_v1.pptx
+++ b/downloads/templates/Template_Performance_Readout_v1.pptx
@@ -578,7 +578,7 @@
           <c:showBubbleSize val="0"/>
           <c:showLeaderLines val="0"/>
         </c:dLbls>
-        <c:gapWidth val="60"/>
+        <c:gapWidth val="70"/>
         <c:overlap val="0"/>
         <c:axId val="2094734554"/>
         <c:axId val="2094734552"/>
@@ -2175,7 +2175,7 @@
         </p:nvSpPr>
         <p:spPr>
           <a:xfrm>
-            <a:off x="457200" y="1234440"/>
+            <a:off x="685800" y="1325880"/>
             <a:ext cx="2286000" cy="365760"/>
           </a:xfrm>
           <a:prstGeom prst="roundRect">
@@ -2202,7 +2202,7 @@
         </p:nvSpPr>
         <p:spPr>
           <a:xfrm>
-            <a:off x="457200" y="1234440"/>
+            <a:off x="685800" y="1325880"/>
             <a:ext cx="2286000" cy="365760"/>
           </a:xfrm>
           <a:prstGeom prst="rect">
@@ -2241,8 +2241,8 @@
         </p:nvSpPr>
         <p:spPr>
           <a:xfrm>
-            <a:off x="457200" y="1783080"/>
-            <a:ext cx="10972800" cy="1463040"/>
+            <a:off x="685800" y="1874520"/>
+            <a:ext cx="10820095" cy="1371600"/>
           </a:xfrm>
           <a:prstGeom prst="rect">
             <a:avLst/>
@@ -2280,8 +2280,8 @@
         </p:nvSpPr>
         <p:spPr>
           <a:xfrm>
-            <a:off x="457200" y="3383280"/>
-            <a:ext cx="7863840" cy="914400"/>
+            <a:off x="685800" y="3429000"/>
+            <a:ext cx="7498080" cy="822960"/>
           </a:xfrm>
           <a:prstGeom prst="rect">
             <a:avLst/>
@@ -2305,7 +2305,7 @@
                 <a:ea typeface="Hanken Grotesk" pitchFamily="34" charset="-122"/>
                 <a:cs typeface="Hanken Grotesk" pitchFamily="34" charset="-120"/>
               </a:rPr>
-              <a:t>Labore et dolore magna aliqua ut enim ad minim veniam quis nostrud exercitation ullamco laboris nisi ut aliquip.</a:t>
+              <a:t>Labore et dolore magna aliqua ut enim ad minim veniam quis nostrud exercitation ullamco.</a:t>
             </a:r>
             <a:endParaRPr lang="en-US" sz="1800" dirty="0"/>
           </a:p>
@@ -2319,7 +2319,7 @@
         </p:nvSpPr>
         <p:spPr>
           <a:xfrm>
-            <a:off x="457200" y="4572000"/>
+            <a:off x="685800" y="4572000"/>
             <a:ext cx="7315200" cy="320040"/>
           </a:xfrm>
           <a:prstGeom prst="rect">
@@ -2358,7 +2358,7 @@
         </p:nvSpPr>
         <p:spPr>
           <a:xfrm>
-            <a:off x="457200" y="5989320"/>
+            <a:off x="685800" y="5943600"/>
             <a:ext cx="7315200" cy="320040"/>
           </a:xfrm>
           <a:prstGeom prst="rect">
@@ -2429,8 +2429,8 @@
         </p:nvSpPr>
         <p:spPr>
           <a:xfrm>
-            <a:off x="457200" y="384048"/>
-            <a:ext cx="8961120" cy="274320"/>
+            <a:off x="685800" y="502920"/>
+            <a:ext cx="8595360" cy="274320"/>
           </a:xfrm>
           <a:prstGeom prst="rect">
             <a:avLst/>
@@ -2468,8 +2468,8 @@
         </p:nvSpPr>
         <p:spPr>
           <a:xfrm>
-            <a:off x="457200" y="676656"/>
-            <a:ext cx="11274552" cy="868680"/>
+            <a:off x="685800" y="804672"/>
+            <a:ext cx="10820095" cy="566928"/>
           </a:xfrm>
           <a:prstGeom prst="rect">
             <a:avLst/>
@@ -2488,7 +2488,7 @@
               <a:buNone/>
             </a:pPr>
             <a:r>
-              <a:rPr lang="en-US" sz="3000" b="1" dirty="0">
+              <a:rPr lang="en-US" sz="2800" b="1" dirty="0">
                 <a:solidFill>
                   <a:srgbClr val="222731"/>
                 </a:solidFill>
@@ -2498,7 +2498,7 @@
               </a:rPr>
               <a:t>Two ways to turn this template into your deck</a:t>
             </a:r>
-            <a:endParaRPr lang="en-US" sz="3000" dirty="0"/>
+            <a:endParaRPr lang="en-US" sz="2800" dirty="0"/>
           </a:p>
         </p:txBody>
       </p:sp>
@@ -2510,7 +2510,7 @@
         </p:nvSpPr>
         <p:spPr>
           <a:xfrm>
-            <a:off x="457200" y="6400800"/>
+            <a:off x="685800" y="6400800"/>
             <a:ext cx="4389120" cy="256032"/>
           </a:xfrm>
           <a:prstGeom prst="rect">
@@ -2550,7 +2550,7 @@
         <p:spPr>
           <a:xfrm>
             <a:off x="4937760" y="6400800"/>
-            <a:ext cx="5943600" cy="256032"/>
+            <a:ext cx="5790895" cy="256032"/>
           </a:xfrm>
           <a:prstGeom prst="rect">
             <a:avLst/>
@@ -2588,7 +2588,7 @@
         </p:nvSpPr>
         <p:spPr>
           <a:xfrm>
-            <a:off x="11091672" y="6400800"/>
+            <a:off x="10865815" y="6400800"/>
             <a:ext cx="640080" cy="256032"/>
           </a:xfrm>
           <a:prstGeom prst="rect">
@@ -2627,12 +2627,12 @@
         </p:nvSpPr>
         <p:spPr>
           <a:xfrm>
-            <a:off x="457200" y="1783080"/>
-            <a:ext cx="4754880" cy="2011680"/>
+            <a:off x="685800" y="1691640"/>
+            <a:ext cx="4754880" cy="1828800"/>
           </a:xfrm>
           <a:prstGeom prst="roundRect">
             <a:avLst>
-              <a:gd name="adj" fmla="val 5455"/>
+              <a:gd name="adj" fmla="val 6000"/>
             </a:avLst>
           </a:prstGeom>
           <a:solidFill>
@@ -2654,8 +2654,8 @@
         </p:nvSpPr>
         <p:spPr>
           <a:xfrm>
-            <a:off x="731520" y="2011680"/>
-            <a:ext cx="4206240" cy="274320"/>
+            <a:off x="1051560" y="1984248"/>
+            <a:ext cx="4023360" cy="274320"/>
           </a:xfrm>
           <a:prstGeom prst="rect">
             <a:avLst/>
@@ -2693,8 +2693,8 @@
         </p:nvSpPr>
         <p:spPr>
           <a:xfrm>
-            <a:off x="731520" y="2331720"/>
-            <a:ext cx="4206240" cy="1371600"/>
+            <a:off x="1051560" y="2331720"/>
+            <a:ext cx="4023360" cy="1097280"/>
           </a:xfrm>
           <a:prstGeom prst="rect">
             <a:avLst/>
@@ -2708,13 +2708,13 @@
           <a:p>
             <a:pPr marL="342900" indent="-342900">
               <a:spcAft>
-                <a:spcPts val="500"/>
+                <a:spcPts val="400"/>
               </a:spcAft>
               <a:buSzPct val="100000"/>
               <a:buChar char="•"/>
             </a:pPr>
             <a:r>
-              <a:rPr lang="en-US" sz="1350" dirty="0">
+              <a:rPr lang="en-US" sz="1300" dirty="0">
                 <a:solidFill>
                   <a:srgbClr val="222731"/>
                 </a:solidFill>
@@ -2724,18 +2724,18 @@
               </a:rPr>
               <a:t>Replace every lorem ipsum line and dummy number with your content.</a:t>
             </a:r>
-            <a:endParaRPr lang="en-US" sz="1350" dirty="0"/>
+            <a:endParaRPr lang="en-US" sz="1300" dirty="0"/>
           </a:p>
           <a:p>
             <a:pPr marL="342900" indent="-342900">
               <a:spcAft>
-                <a:spcPts val="500"/>
+                <a:spcPts val="400"/>
               </a:spcAft>
               <a:buSzPct val="100000"/>
               <a:buChar char="•"/>
             </a:pPr>
             <a:r>
-              <a:rPr lang="en-US" sz="1350" dirty="0">
+              <a:rPr lang="en-US" sz="1300" dirty="0">
                 <a:solidFill>
                   <a:srgbClr val="222731"/>
                 </a:solidFill>
@@ -2745,18 +2745,18 @@
               </a:rPr>
               <a:t>Keep the layouts. Delete slides you have no evidence for.</a:t>
             </a:r>
-            <a:endParaRPr lang="en-US" sz="1350" dirty="0"/>
+            <a:endParaRPr lang="en-US" sz="1300" dirty="0"/>
           </a:p>
           <a:p>
             <a:pPr marL="342900" indent="-342900">
               <a:spcAft>
-                <a:spcPts val="500"/>
+                <a:spcPts val="400"/>
               </a:spcAft>
               <a:buSzPct val="100000"/>
               <a:buChar char="•"/>
             </a:pPr>
             <a:r>
-              <a:rPr lang="en-US" sz="1350" dirty="0">
+              <a:rPr lang="en-US" sz="1300" dirty="0">
                 <a:solidFill>
                   <a:srgbClr val="222731"/>
                 </a:solidFill>
@@ -2766,7 +2766,7 @@
               </a:rPr>
               <a:t>Put real screenshots behind the grey phone screens.</a:t>
             </a:r>
-            <a:endParaRPr lang="en-US" sz="1350" dirty="0"/>
+            <a:endParaRPr lang="en-US" sz="1300" dirty="0"/>
           </a:p>
         </p:txBody>
       </p:sp>
@@ -2778,12 +2778,12 @@
         </p:nvSpPr>
         <p:spPr>
           <a:xfrm>
-            <a:off x="457200" y="3977640"/>
-            <a:ext cx="4754880" cy="2148840"/>
+            <a:off x="685800" y="3794760"/>
+            <a:ext cx="4754880" cy="1965960"/>
           </a:xfrm>
           <a:prstGeom prst="roundRect">
             <a:avLst>
-              <a:gd name="adj" fmla="val 5106"/>
+              <a:gd name="adj" fmla="val 5581"/>
             </a:avLst>
           </a:prstGeom>
           <a:solidFill>
@@ -2805,8 +2805,8 @@
         </p:nvSpPr>
         <p:spPr>
           <a:xfrm>
-            <a:off x="731520" y="4206240"/>
-            <a:ext cx="4206240" cy="274320"/>
+            <a:off x="1051560" y="4087368"/>
+            <a:ext cx="4023360" cy="274320"/>
           </a:xfrm>
           <a:prstGeom prst="rect">
             <a:avLst/>
@@ -2830,7 +2830,7 @@
                 <a:ea typeface="Hanken Grotesk" pitchFamily="34" charset="-122"/>
                 <a:cs typeface="Hanken Grotesk" pitchFamily="34" charset="-120"/>
               </a:rPr>
-              <a:t>OPTION B · USE YOUR AI TOOL</a:t>
+              <a:t>OPTION B · USE CLAUDE</a:t>
             </a:r>
             <a:endParaRPr lang="en-US" sz="1050" dirty="0"/>
           </a:p>
@@ -2844,8 +2844,8 @@
         </p:nvSpPr>
         <p:spPr>
           <a:xfrm>
-            <a:off x="731520" y="4526280"/>
-            <a:ext cx="4206240" cy="274320"/>
+            <a:off x="1051560" y="4416552"/>
+            <a:ext cx="4023360" cy="274320"/>
           </a:xfrm>
           <a:prstGeom prst="rect">
             <a:avLst/>
@@ -2869,7 +2869,7 @@
                 <a:ea typeface="Hanken Grotesk" pitchFamily="34" charset="-122"/>
                 <a:cs typeface="Hanken Grotesk" pitchFamily="34" charset="-120"/>
               </a:rPr>
-              <a:t>Attach cx-presentation-system.md, then write:</a:t>
+              <a:t>Attach the Storyloom spec, then write:</a:t>
             </a:r>
             <a:endParaRPr lang="en-US" sz="1350" dirty="0"/>
           </a:p>
@@ -2883,12 +2883,12 @@
         </p:nvSpPr>
         <p:spPr>
           <a:xfrm>
-            <a:off x="731520" y="4846320"/>
-            <a:ext cx="4206240" cy="1097280"/>
+            <a:off x="1051560" y="4782312"/>
+            <a:ext cx="4023360" cy="704088"/>
           </a:xfrm>
           <a:prstGeom prst="roundRect">
             <a:avLst>
-              <a:gd name="adj" fmla="val 6667"/>
+              <a:gd name="adj" fmla="val 10390"/>
             </a:avLst>
           </a:prstGeom>
           <a:solidFill>
@@ -2910,8 +2910,8 @@
         </p:nvSpPr>
         <p:spPr>
           <a:xfrm>
-            <a:off x="868680" y="4892040"/>
-            <a:ext cx="3931920" cy="1005840"/>
+            <a:off x="1188720" y="4782312"/>
+            <a:ext cx="3749040" cy="704088"/>
           </a:xfrm>
           <a:prstGeom prst="rect">
             <a:avLst/>
@@ -2949,8 +2949,8 @@
         </p:nvSpPr>
         <p:spPr>
           <a:xfrm>
-            <a:off x="5577840" y="1783080"/>
-            <a:ext cx="6156655" cy="274320"/>
+            <a:off x="5989320" y="1691640"/>
+            <a:ext cx="5516575" cy="274320"/>
           </a:xfrm>
           <a:prstGeom prst="rect">
             <a:avLst/>
@@ -2988,8 +2988,8 @@
         </p:nvSpPr>
         <p:spPr>
           <a:xfrm>
-            <a:off x="5577840" y="2148840"/>
-            <a:ext cx="411480" cy="329184"/>
+            <a:off x="5989320" y="2075688"/>
+            <a:ext cx="411480" cy="347472"/>
           </a:xfrm>
           <a:prstGeom prst="rect">
             <a:avLst/>
@@ -3027,8 +3027,8 @@
         </p:nvSpPr>
         <p:spPr>
           <a:xfrm>
-            <a:off x="6035040" y="2148840"/>
-            <a:ext cx="3322015" cy="329184"/>
+            <a:off x="6446520" y="2075688"/>
+            <a:ext cx="2681935" cy="347472"/>
           </a:xfrm>
           <a:prstGeom prst="rect">
             <a:avLst/>
@@ -3066,8 +3066,8 @@
         </p:nvSpPr>
         <p:spPr>
           <a:xfrm>
-            <a:off x="9402775" y="2148840"/>
-            <a:ext cx="2331720" cy="329184"/>
+            <a:off x="9174175" y="2075688"/>
+            <a:ext cx="2331720" cy="347472"/>
           </a:xfrm>
           <a:prstGeom prst="rect">
             <a:avLst/>
@@ -3105,8 +3105,8 @@
         </p:nvSpPr>
         <p:spPr>
           <a:xfrm>
-            <a:off x="5577840" y="2478024"/>
-            <a:ext cx="6156655" cy="0"/>
+            <a:off x="5989320" y="2423160"/>
+            <a:ext cx="5516575" cy="0"/>
           </a:xfrm>
           <a:prstGeom prst="line">
             <a:avLst/>
@@ -3128,8 +3128,8 @@
         </p:nvSpPr>
         <p:spPr>
           <a:xfrm>
-            <a:off x="5577840" y="2478024"/>
-            <a:ext cx="411480" cy="329184"/>
+            <a:off x="5989320" y="2423160"/>
+            <a:ext cx="411480" cy="347472"/>
           </a:xfrm>
           <a:prstGeom prst="rect">
             <a:avLst/>
@@ -3167,8 +3167,8 @@
         </p:nvSpPr>
         <p:spPr>
           <a:xfrm>
-            <a:off x="6035040" y="2478024"/>
-            <a:ext cx="3322015" cy="329184"/>
+            <a:off x="6446520" y="2423160"/>
+            <a:ext cx="2681935" cy="347472"/>
           </a:xfrm>
           <a:prstGeom prst="rect">
             <a:avLst/>
@@ -3206,8 +3206,8 @@
         </p:nvSpPr>
         <p:spPr>
           <a:xfrm>
-            <a:off x="9402775" y="2478024"/>
-            <a:ext cx="2331720" cy="329184"/>
+            <a:off x="9174175" y="2423160"/>
+            <a:ext cx="2331720" cy="347472"/>
           </a:xfrm>
           <a:prstGeom prst="rect">
             <a:avLst/>
@@ -3245,8 +3245,8 @@
         </p:nvSpPr>
         <p:spPr>
           <a:xfrm>
-            <a:off x="5577840" y="2807208"/>
-            <a:ext cx="6156655" cy="0"/>
+            <a:off x="5989320" y="2770632"/>
+            <a:ext cx="5516575" cy="0"/>
           </a:xfrm>
           <a:prstGeom prst="line">
             <a:avLst/>
@@ -3268,8 +3268,8 @@
         </p:nvSpPr>
         <p:spPr>
           <a:xfrm>
-            <a:off x="5577840" y="2807208"/>
-            <a:ext cx="411480" cy="329184"/>
+            <a:off x="5989320" y="2770632"/>
+            <a:ext cx="411480" cy="347472"/>
           </a:xfrm>
           <a:prstGeom prst="rect">
             <a:avLst/>
@@ -3307,8 +3307,8 @@
         </p:nvSpPr>
         <p:spPr>
           <a:xfrm>
-            <a:off x="6035040" y="2807208"/>
-            <a:ext cx="3322015" cy="329184"/>
+            <a:off x="6446520" y="2770632"/>
+            <a:ext cx="2681935" cy="347472"/>
           </a:xfrm>
           <a:prstGeom prst="rect">
             <a:avLst/>
@@ -3346,8 +3346,8 @@
         </p:nvSpPr>
         <p:spPr>
           <a:xfrm>
-            <a:off x="9402775" y="2807208"/>
-            <a:ext cx="2331720" cy="329184"/>
+            <a:off x="9174175" y="2770632"/>
+            <a:ext cx="2331720" cy="347472"/>
           </a:xfrm>
           <a:prstGeom prst="rect">
             <a:avLst/>
@@ -3385,8 +3385,8 @@
         </p:nvSpPr>
         <p:spPr>
           <a:xfrm>
-            <a:off x="5577840" y="3136392"/>
-            <a:ext cx="6156655" cy="0"/>
+            <a:off x="5989320" y="3118104"/>
+            <a:ext cx="5516575" cy="0"/>
           </a:xfrm>
           <a:prstGeom prst="line">
             <a:avLst/>
@@ -3408,8 +3408,8 @@
         </p:nvSpPr>
         <p:spPr>
           <a:xfrm>
-            <a:off x="5577840" y="3136392"/>
-            <a:ext cx="411480" cy="329184"/>
+            <a:off x="5989320" y="3118104"/>
+            <a:ext cx="411480" cy="347472"/>
           </a:xfrm>
           <a:prstGeom prst="rect">
             <a:avLst/>
@@ -3447,8 +3447,8 @@
         </p:nvSpPr>
         <p:spPr>
           <a:xfrm>
-            <a:off x="6035040" y="3136392"/>
-            <a:ext cx="3322015" cy="329184"/>
+            <a:off x="6446520" y="3118104"/>
+            <a:ext cx="2681935" cy="347472"/>
           </a:xfrm>
           <a:prstGeom prst="rect">
             <a:avLst/>
@@ -3486,8 +3486,8 @@
         </p:nvSpPr>
         <p:spPr>
           <a:xfrm>
-            <a:off x="9402775" y="3136392"/>
-            <a:ext cx="2331720" cy="329184"/>
+            <a:off x="9174175" y="3118104"/>
+            <a:ext cx="2331720" cy="347472"/>
           </a:xfrm>
           <a:prstGeom prst="rect">
             <a:avLst/>
@@ -3525,8 +3525,8 @@
         </p:nvSpPr>
         <p:spPr>
           <a:xfrm>
-            <a:off x="5577840" y="3465576"/>
-            <a:ext cx="6156655" cy="0"/>
+            <a:off x="5989320" y="3465576"/>
+            <a:ext cx="5516575" cy="0"/>
           </a:xfrm>
           <a:prstGeom prst="line">
             <a:avLst/>
@@ -3548,8 +3548,8 @@
         </p:nvSpPr>
         <p:spPr>
           <a:xfrm>
-            <a:off x="5577840" y="3465576"/>
-            <a:ext cx="411480" cy="329184"/>
+            <a:off x="5989320" y="3465576"/>
+            <a:ext cx="411480" cy="347472"/>
           </a:xfrm>
           <a:prstGeom prst="rect">
             <a:avLst/>
@@ -3587,8 +3587,8 @@
         </p:nvSpPr>
         <p:spPr>
           <a:xfrm>
-            <a:off x="6035040" y="3465576"/>
-            <a:ext cx="3322015" cy="329184"/>
+            <a:off x="6446520" y="3465576"/>
+            <a:ext cx="2681935" cy="347472"/>
           </a:xfrm>
           <a:prstGeom prst="rect">
             <a:avLst/>
@@ -3626,8 +3626,8 @@
         </p:nvSpPr>
         <p:spPr>
           <a:xfrm>
-            <a:off x="9402775" y="3465576"/>
-            <a:ext cx="2331720" cy="329184"/>
+            <a:off x="9174175" y="3465576"/>
+            <a:ext cx="2331720" cy="347472"/>
           </a:xfrm>
           <a:prstGeom prst="rect">
             <a:avLst/>
@@ -3665,8 +3665,8 @@
         </p:nvSpPr>
         <p:spPr>
           <a:xfrm>
-            <a:off x="5577840" y="3794760"/>
-            <a:ext cx="6156655" cy="0"/>
+            <a:off x="5989320" y="3813048"/>
+            <a:ext cx="5516575" cy="0"/>
           </a:xfrm>
           <a:prstGeom prst="line">
             <a:avLst/>
@@ -3688,8 +3688,8 @@
         </p:nvSpPr>
         <p:spPr>
           <a:xfrm>
-            <a:off x="5577840" y="3794760"/>
-            <a:ext cx="411480" cy="329184"/>
+            <a:off x="5989320" y="3813048"/>
+            <a:ext cx="411480" cy="347472"/>
           </a:xfrm>
           <a:prstGeom prst="rect">
             <a:avLst/>
@@ -3727,8 +3727,8 @@
         </p:nvSpPr>
         <p:spPr>
           <a:xfrm>
-            <a:off x="6035040" y="3794760"/>
-            <a:ext cx="3322015" cy="329184"/>
+            <a:off x="6446520" y="3813048"/>
+            <a:ext cx="2681935" cy="347472"/>
           </a:xfrm>
           <a:prstGeom prst="rect">
             <a:avLst/>
@@ -3766,8 +3766,8 @@
         </p:nvSpPr>
         <p:spPr>
           <a:xfrm>
-            <a:off x="9402775" y="3794760"/>
-            <a:ext cx="2331720" cy="329184"/>
+            <a:off x="9174175" y="3813048"/>
+            <a:ext cx="2331720" cy="347472"/>
           </a:xfrm>
           <a:prstGeom prst="rect">
             <a:avLst/>
@@ -3805,8 +3805,8 @@
         </p:nvSpPr>
         <p:spPr>
           <a:xfrm>
-            <a:off x="5577840" y="4123944"/>
-            <a:ext cx="6156655" cy="0"/>
+            <a:off x="5989320" y="4160520"/>
+            <a:ext cx="5516575" cy="0"/>
           </a:xfrm>
           <a:prstGeom prst="line">
             <a:avLst/>
@@ -3828,8 +3828,8 @@
         </p:nvSpPr>
         <p:spPr>
           <a:xfrm>
-            <a:off x="5577840" y="4123944"/>
-            <a:ext cx="411480" cy="329184"/>
+            <a:off x="5989320" y="4160520"/>
+            <a:ext cx="411480" cy="347472"/>
           </a:xfrm>
           <a:prstGeom prst="rect">
             <a:avLst/>
@@ -3867,8 +3867,8 @@
         </p:nvSpPr>
         <p:spPr>
           <a:xfrm>
-            <a:off x="6035040" y="4123944"/>
-            <a:ext cx="3322015" cy="329184"/>
+            <a:off x="6446520" y="4160520"/>
+            <a:ext cx="2681935" cy="347472"/>
           </a:xfrm>
           <a:prstGeom prst="rect">
             <a:avLst/>
@@ -3906,8 +3906,8 @@
         </p:nvSpPr>
         <p:spPr>
           <a:xfrm>
-            <a:off x="9402775" y="4123944"/>
-            <a:ext cx="2331720" cy="329184"/>
+            <a:off x="9174175" y="4160520"/>
+            <a:ext cx="2331720" cy="347472"/>
           </a:xfrm>
           <a:prstGeom prst="rect">
             <a:avLst/>
@@ -3945,8 +3945,8 @@
         </p:nvSpPr>
         <p:spPr>
           <a:xfrm>
-            <a:off x="5577840" y="6172200"/>
-            <a:ext cx="6156655" cy="228600"/>
+            <a:off x="5989320" y="5989320"/>
+            <a:ext cx="5516575" cy="256032"/>
           </a:xfrm>
           <a:prstGeom prst="rect">
             <a:avLst/>
@@ -4016,8 +4016,8 @@
         </p:nvSpPr>
         <p:spPr>
           <a:xfrm>
-            <a:off x="457200" y="384048"/>
-            <a:ext cx="8961120" cy="274320"/>
+            <a:off x="685800" y="502920"/>
+            <a:ext cx="8595360" cy="274320"/>
           </a:xfrm>
           <a:prstGeom prst="rect">
             <a:avLst/>
@@ -4055,8 +4055,8 @@
         </p:nvSpPr>
         <p:spPr>
           <a:xfrm>
-            <a:off x="457200" y="676656"/>
-            <a:ext cx="11274552" cy="868680"/>
+            <a:off x="685800" y="804672"/>
+            <a:ext cx="10820095" cy="566928"/>
           </a:xfrm>
           <a:prstGeom prst="rect">
             <a:avLst/>
@@ -4075,7 +4075,7 @@
               <a:buNone/>
             </a:pPr>
             <a:r>
-              <a:rPr lang="en-US" sz="3000" b="1" dirty="0">
+              <a:rPr lang="en-US" sz="2800" b="1" dirty="0">
                 <a:solidFill>
                   <a:srgbClr val="222731"/>
                 </a:solidFill>
@@ -4083,9 +4083,9 @@
                 <a:ea typeface="Bricolage Grotesque" pitchFamily="34" charset="-122"/>
                 <a:cs typeface="Bricolage Grotesque" pitchFamily="34" charset="-120"/>
               </a:rPr>
-              <a:t>Elit sed do eiusmod tempor incididunt ut labore et</a:t>
-            </a:r>
-            <a:endParaRPr lang="en-US" sz="3000" dirty="0"/>
+              <a:t>Elit sed do eiusmod tempor incididunt</a:t>
+            </a:r>
+            <a:endParaRPr lang="en-US" sz="2800" dirty="0"/>
           </a:p>
         </p:txBody>
       </p:sp>
@@ -4097,7 +4097,7 @@
         </p:nvSpPr>
         <p:spPr>
           <a:xfrm>
-            <a:off x="457200" y="6400800"/>
+            <a:off x="685800" y="6400800"/>
             <a:ext cx="4389120" cy="256032"/>
           </a:xfrm>
           <a:prstGeom prst="rect">
@@ -4137,7 +4137,7 @@
         <p:spPr>
           <a:xfrm>
             <a:off x="4937760" y="6400800"/>
-            <a:ext cx="5943600" cy="256032"/>
+            <a:ext cx="5790895" cy="256032"/>
           </a:xfrm>
           <a:prstGeom prst="rect">
             <a:avLst/>
@@ -4175,7 +4175,7 @@
         </p:nvSpPr>
         <p:spPr>
           <a:xfrm>
-            <a:off x="11091672" y="6400800"/>
+            <a:off x="10865815" y="6400800"/>
             <a:ext cx="640080" cy="256032"/>
           </a:xfrm>
           <a:prstGeom prst="rect">
@@ -4214,12 +4214,12 @@
         </p:nvSpPr>
         <p:spPr>
           <a:xfrm>
-            <a:off x="457200" y="1783080"/>
-            <a:ext cx="3576218" cy="2788920"/>
+            <a:off x="685800" y="1691640"/>
+            <a:ext cx="3423818" cy="2514600"/>
           </a:xfrm>
           <a:prstGeom prst="roundRect">
             <a:avLst>
-              <a:gd name="adj" fmla="val 3934"/>
+              <a:gd name="adj" fmla="val 4364"/>
             </a:avLst>
           </a:prstGeom>
           <a:solidFill>
@@ -4241,7 +4241,7 @@
         </p:nvSpPr>
         <p:spPr>
           <a:xfrm>
-            <a:off x="731520" y="2002536"/>
+            <a:off x="1051560" y="2057400"/>
             <a:ext cx="457200" cy="457200"/>
           </a:xfrm>
           <a:prstGeom prst="roundRect">
@@ -4276,7 +4276,7 @@
         </p:blipFill>
         <p:spPr>
           <a:xfrm>
-            <a:off x="822960" y="2093976"/>
+            <a:off x="1143000" y="2148840"/>
             <a:ext cx="274320" cy="274320"/>
           </a:xfrm>
           <a:prstGeom prst="rect">
@@ -4292,8 +4292,8 @@
         </p:nvSpPr>
         <p:spPr>
           <a:xfrm>
-            <a:off x="1325880" y="2084832"/>
-            <a:ext cx="2433218" cy="274320"/>
+            <a:off x="1645920" y="2148840"/>
+            <a:ext cx="2097938" cy="274320"/>
           </a:xfrm>
           <a:prstGeom prst="rect">
             <a:avLst/>
@@ -4331,8 +4331,8 @@
         </p:nvSpPr>
         <p:spPr>
           <a:xfrm>
-            <a:off x="731520" y="2560320"/>
-            <a:ext cx="3027578" cy="777240"/>
+            <a:off x="1051560" y="2651760"/>
+            <a:ext cx="2692298" cy="731520"/>
           </a:xfrm>
           <a:prstGeom prst="rect">
             <a:avLst/>
@@ -4370,8 +4370,8 @@
         </p:nvSpPr>
         <p:spPr>
           <a:xfrm>
-            <a:off x="731520" y="3429000"/>
-            <a:ext cx="3027578" cy="1005840"/>
+            <a:off x="1051560" y="3429000"/>
+            <a:ext cx="2692298" cy="640080"/>
           </a:xfrm>
           <a:prstGeom prst="rect">
             <a:avLst/>
@@ -4389,13 +4389,13 @@
             <a:r>
               <a:rPr lang="en-US" sz="1350" dirty="0">
                 <a:solidFill>
-                  <a:srgbClr val="222731"/>
-                </a:solidFill>
-                <a:latin typeface="Hanken Grotesk" pitchFamily="34" charset="0"/>
-                <a:ea typeface="Hanken Grotesk" pitchFamily="34" charset="-122"/>
-                <a:cs typeface="Hanken Grotesk" pitchFamily="34" charset="-120"/>
-              </a:rPr>
-              <a:t>Labore et dolore magna aliqua ut enim ad minim veniam quis nostrud exercitation ullamco laboris nisi.</a:t>
+                  <a:srgbClr val="63666A"/>
+                </a:solidFill>
+                <a:latin typeface="Hanken Grotesk" pitchFamily="34" charset="0"/>
+                <a:ea typeface="Hanken Grotesk" pitchFamily="34" charset="-122"/>
+                <a:cs typeface="Hanken Grotesk" pitchFamily="34" charset="-120"/>
+              </a:rPr>
+              <a:t>Labore et dolore magna aliqua ut enim ad minim veniam quis nostrud.</a:t>
             </a:r>
             <a:endParaRPr lang="en-US" sz="1350" dirty="0"/>
           </a:p>
@@ -4409,12 +4409,12 @@
         </p:nvSpPr>
         <p:spPr>
           <a:xfrm>
-            <a:off x="4307738" y="1783080"/>
-            <a:ext cx="3576218" cy="2788920"/>
+            <a:off x="4383938" y="1691640"/>
+            <a:ext cx="3423818" cy="2514600"/>
           </a:xfrm>
           <a:prstGeom prst="roundRect">
             <a:avLst>
-              <a:gd name="adj" fmla="val 3934"/>
+              <a:gd name="adj" fmla="val 4364"/>
             </a:avLst>
           </a:prstGeom>
           <a:solidFill>
@@ -4436,7 +4436,7 @@
         </p:nvSpPr>
         <p:spPr>
           <a:xfrm>
-            <a:off x="4582058" y="2002536"/>
+            <a:off x="4749698" y="2057400"/>
             <a:ext cx="457200" cy="457200"/>
           </a:xfrm>
           <a:prstGeom prst="roundRect">
@@ -4471,7 +4471,7 @@
         </p:blipFill>
         <p:spPr>
           <a:xfrm>
-            <a:off x="4673498" y="2093976"/>
+            <a:off x="4841138" y="2148840"/>
             <a:ext cx="274320" cy="274320"/>
           </a:xfrm>
           <a:prstGeom prst="rect">
@@ -4487,8 +4487,8 @@
         </p:nvSpPr>
         <p:spPr>
           <a:xfrm>
-            <a:off x="5176418" y="2084832"/>
-            <a:ext cx="2433218" cy="274320"/>
+            <a:off x="5344058" y="2148840"/>
+            <a:ext cx="2097938" cy="274320"/>
           </a:xfrm>
           <a:prstGeom prst="rect">
             <a:avLst/>
@@ -4526,8 +4526,8 @@
         </p:nvSpPr>
         <p:spPr>
           <a:xfrm>
-            <a:off x="4582058" y="2560320"/>
-            <a:ext cx="3027578" cy="777240"/>
+            <a:off x="4749698" y="2651760"/>
+            <a:ext cx="2692298" cy="731520"/>
           </a:xfrm>
           <a:prstGeom prst="rect">
             <a:avLst/>
@@ -4565,8 +4565,8 @@
         </p:nvSpPr>
         <p:spPr>
           <a:xfrm>
-            <a:off x="4582058" y="3429000"/>
-            <a:ext cx="3027578" cy="1005840"/>
+            <a:off x="4749698" y="3429000"/>
+            <a:ext cx="2692298" cy="640080"/>
           </a:xfrm>
           <a:prstGeom prst="rect">
             <a:avLst/>
@@ -4584,13 +4584,13 @@
             <a:r>
               <a:rPr lang="en-US" sz="1350" dirty="0">
                 <a:solidFill>
-                  <a:srgbClr val="222731"/>
-                </a:solidFill>
-                <a:latin typeface="Hanken Grotesk" pitchFamily="34" charset="0"/>
-                <a:ea typeface="Hanken Grotesk" pitchFamily="34" charset="-122"/>
-                <a:cs typeface="Hanken Grotesk" pitchFamily="34" charset="-120"/>
-              </a:rPr>
-              <a:t>Ad minim veniam quis nostrud exercitation ullamco laboris nisi ut aliquip ex ea commodo consequat duis.</a:t>
+                  <a:srgbClr val="63666A"/>
+                </a:solidFill>
+                <a:latin typeface="Hanken Grotesk" pitchFamily="34" charset="0"/>
+                <a:ea typeface="Hanken Grotesk" pitchFamily="34" charset="-122"/>
+                <a:cs typeface="Hanken Grotesk" pitchFamily="34" charset="-120"/>
+              </a:rPr>
+              <a:t>Ad minim veniam quis nostrud exercitation ullamco laboris nisi ut aliquip ex.</a:t>
             </a:r>
             <a:endParaRPr lang="en-US" sz="1350" dirty="0"/>
           </a:p>
@@ -4604,12 +4604,12 @@
         </p:nvSpPr>
         <p:spPr>
           <a:xfrm>
-            <a:off x="8158277" y="1783080"/>
-            <a:ext cx="3576218" cy="2788920"/>
+            <a:off x="8082077" y="1691640"/>
+            <a:ext cx="3423818" cy="2514600"/>
           </a:xfrm>
           <a:prstGeom prst="roundRect">
             <a:avLst>
-              <a:gd name="adj" fmla="val 3934"/>
+              <a:gd name="adj" fmla="val 4364"/>
             </a:avLst>
           </a:prstGeom>
           <a:solidFill>
@@ -4631,7 +4631,7 @@
         </p:nvSpPr>
         <p:spPr>
           <a:xfrm>
-            <a:off x="8432597" y="2002536"/>
+            <a:off x="8447837" y="2057400"/>
             <a:ext cx="457200" cy="457200"/>
           </a:xfrm>
           <a:prstGeom prst="roundRect">
@@ -4666,7 +4666,7 @@
         </p:blipFill>
         <p:spPr>
           <a:xfrm>
-            <a:off x="8524037" y="2093976"/>
+            <a:off x="8539277" y="2148840"/>
             <a:ext cx="274320" cy="274320"/>
           </a:xfrm>
           <a:prstGeom prst="rect">
@@ -4682,8 +4682,8 @@
         </p:nvSpPr>
         <p:spPr>
           <a:xfrm>
-            <a:off x="9026957" y="2084832"/>
-            <a:ext cx="2433218" cy="274320"/>
+            <a:off x="9042197" y="2148840"/>
+            <a:ext cx="2097938" cy="274320"/>
           </a:xfrm>
           <a:prstGeom prst="rect">
             <a:avLst/>
@@ -4721,8 +4721,8 @@
         </p:nvSpPr>
         <p:spPr>
           <a:xfrm>
-            <a:off x="8432597" y="2560320"/>
-            <a:ext cx="3027578" cy="777240"/>
+            <a:off x="8447837" y="2651760"/>
+            <a:ext cx="2692298" cy="731520"/>
           </a:xfrm>
           <a:prstGeom prst="rect">
             <a:avLst/>
@@ -4760,8 +4760,8 @@
         </p:nvSpPr>
         <p:spPr>
           <a:xfrm>
-            <a:off x="8432597" y="3429000"/>
-            <a:ext cx="3027578" cy="1005840"/>
+            <a:off x="8447837" y="3429000"/>
+            <a:ext cx="2692298" cy="640080"/>
           </a:xfrm>
           <a:prstGeom prst="rect">
             <a:avLst/>
@@ -4779,13 +4779,13 @@
             <a:r>
               <a:rPr lang="en-US" sz="1350" dirty="0">
                 <a:solidFill>
-                  <a:srgbClr val="222731"/>
-                </a:solidFill>
-                <a:latin typeface="Hanken Grotesk" pitchFamily="34" charset="0"/>
-                <a:ea typeface="Hanken Grotesk" pitchFamily="34" charset="-122"/>
-                <a:cs typeface="Hanken Grotesk" pitchFamily="34" charset="-120"/>
-              </a:rPr>
-              <a:t>Laboris nisi ut aliquip ex ea commodo consequat duis aute irure dolor in reprehenderit in voluptate.</a:t>
+                  <a:srgbClr val="63666A"/>
+                </a:solidFill>
+                <a:latin typeface="Hanken Grotesk" pitchFamily="34" charset="0"/>
+                <a:ea typeface="Hanken Grotesk" pitchFamily="34" charset="-122"/>
+                <a:cs typeface="Hanken Grotesk" pitchFamily="34" charset="-120"/>
+              </a:rPr>
+              <a:t>Laboris nisi ut aliquip ex ea commodo consequat duis aute irure dolor.</a:t>
             </a:r>
             <a:endParaRPr lang="en-US" sz="1350" dirty="0"/>
           </a:p>
@@ -4799,12 +4799,12 @@
         </p:nvSpPr>
         <p:spPr>
           <a:xfrm>
-            <a:off x="457200" y="4846320"/>
-            <a:ext cx="11277295" cy="1234440"/>
+            <a:off x="685800" y="4480560"/>
+            <a:ext cx="10820095" cy="1143000"/>
           </a:xfrm>
           <a:prstGeom prst="roundRect">
             <a:avLst>
-              <a:gd name="adj" fmla="val 7407"/>
+              <a:gd name="adj" fmla="val 9600"/>
             </a:avLst>
           </a:prstGeom>
           <a:solidFill>
@@ -4826,12 +4826,12 @@
         </p:nvSpPr>
         <p:spPr>
           <a:xfrm>
-            <a:off x="731520" y="5230368"/>
-            <a:ext cx="1188720" cy="457200"/>
+            <a:off x="1051560" y="4841748"/>
+            <a:ext cx="1188720" cy="420624"/>
           </a:xfrm>
           <a:prstGeom prst="roundRect">
             <a:avLst>
-              <a:gd name="adj" fmla="val 16000"/>
+              <a:gd name="adj" fmla="val 17391"/>
             </a:avLst>
           </a:prstGeom>
           <a:solidFill>
@@ -4853,8 +4853,8 @@
         </p:nvSpPr>
         <p:spPr>
           <a:xfrm>
-            <a:off x="731520" y="5230368"/>
-            <a:ext cx="1188720" cy="457200"/>
+            <a:off x="1051560" y="4841748"/>
+            <a:ext cx="1188720" cy="420624"/>
           </a:xfrm>
           <a:prstGeom prst="rect">
             <a:avLst/>
@@ -4892,8 +4892,8 @@
         </p:nvSpPr>
         <p:spPr>
           <a:xfrm>
-            <a:off x="2194560" y="4846320"/>
-            <a:ext cx="9052560" cy="1234440"/>
+            <a:off x="2514600" y="4480560"/>
+            <a:ext cx="8625535" cy="1143000"/>
           </a:xfrm>
           <a:prstGeom prst="rect">
             <a:avLst/>
@@ -4917,7 +4917,7 @@
                 <a:ea typeface="Hanken Grotesk" pitchFamily="34" charset="-122"/>
                 <a:cs typeface="Hanken Grotesk" pitchFamily="34" charset="-120"/>
               </a:rPr>
-              <a:t>Deserunt mollit anim id est laborum curabitur pretium tincidunt lacus nulla gravida orci a odio nullam varius turpis et commodo pharetra est.</a:t>
+              <a:t>Deserunt mollit anim id est laborum curabitur pretium tincidunt lacus nulla gravida orci a odio nullam.</a:t>
             </a:r>
             <a:endParaRPr lang="en-US" sz="1600" dirty="0"/>
           </a:p>
@@ -4963,8 +4963,8 @@
         </p:nvSpPr>
         <p:spPr>
           <a:xfrm>
-            <a:off x="457200" y="384048"/>
-            <a:ext cx="8961120" cy="274320"/>
+            <a:off x="685800" y="502920"/>
+            <a:ext cx="8595360" cy="274320"/>
           </a:xfrm>
           <a:prstGeom prst="rect">
             <a:avLst/>
@@ -5002,8 +5002,8 @@
         </p:nvSpPr>
         <p:spPr>
           <a:xfrm>
-            <a:off x="457200" y="676656"/>
-            <a:ext cx="11274552" cy="868680"/>
+            <a:off x="685800" y="804672"/>
+            <a:ext cx="10820095" cy="566928"/>
           </a:xfrm>
           <a:prstGeom prst="rect">
             <a:avLst/>
@@ -5022,7 +5022,7 @@
               <a:buNone/>
             </a:pPr>
             <a:r>
-              <a:rPr lang="en-US" sz="3000" b="1" dirty="0">
+              <a:rPr lang="en-US" sz="2800" b="1" dirty="0">
                 <a:solidFill>
                   <a:srgbClr val="222731"/>
                 </a:solidFill>
@@ -5030,9 +5030,9 @@
                 <a:ea typeface="Bricolage Grotesque" pitchFamily="34" charset="-122"/>
                 <a:cs typeface="Bricolage Grotesque" pitchFamily="34" charset="-120"/>
               </a:rPr>
-              <a:t>Laboris nisi ut aliquip ex ea commodo consequat duis aute</a:t>
-            </a:r>
-            <a:endParaRPr lang="en-US" sz="3000" dirty="0"/>
+              <a:t>Laboris nisi ut aliquip ex ea commodo</a:t>
+            </a:r>
+            <a:endParaRPr lang="en-US" sz="2800" dirty="0"/>
           </a:p>
         </p:txBody>
       </p:sp>
@@ -5044,7 +5044,7 @@
         </p:nvSpPr>
         <p:spPr>
           <a:xfrm>
-            <a:off x="457200" y="6400800"/>
+            <a:off x="685800" y="6400800"/>
             <a:ext cx="4389120" cy="256032"/>
           </a:xfrm>
           <a:prstGeom prst="rect">
@@ -5084,7 +5084,7 @@
         <p:spPr>
           <a:xfrm>
             <a:off x="4937760" y="6400800"/>
-            <a:ext cx="5943600" cy="256032"/>
+            <a:ext cx="5790895" cy="256032"/>
           </a:xfrm>
           <a:prstGeom prst="rect">
             <a:avLst/>
@@ -5122,7 +5122,7 @@
         </p:nvSpPr>
         <p:spPr>
           <a:xfrm>
-            <a:off x="11091672" y="6400800"/>
+            <a:off x="10865815" y="6400800"/>
             <a:ext cx="640080" cy="256032"/>
           </a:xfrm>
           <a:prstGeom prst="rect">
@@ -5161,12 +5161,12 @@
         </p:nvSpPr>
         <p:spPr>
           <a:xfrm>
-            <a:off x="457200" y="1783080"/>
-            <a:ext cx="2613584" cy="3108960"/>
+            <a:off x="685800" y="1691640"/>
+            <a:ext cx="2499284" cy="2697480"/>
           </a:xfrm>
           <a:prstGeom prst="roundRect">
             <a:avLst>
-              <a:gd name="adj" fmla="val 4198"/>
+              <a:gd name="adj" fmla="val 4390"/>
             </a:avLst>
           </a:prstGeom>
           <a:solidFill>
@@ -5188,8 +5188,8 @@
         </p:nvSpPr>
         <p:spPr>
           <a:xfrm>
-            <a:off x="731520" y="2057400"/>
-            <a:ext cx="2064944" cy="548640"/>
+            <a:off x="1051560" y="2057400"/>
+            <a:ext cx="1767764" cy="292608"/>
           </a:xfrm>
           <a:prstGeom prst="rect">
             <a:avLst/>
@@ -5227,8 +5227,8 @@
         </p:nvSpPr>
         <p:spPr>
           <a:xfrm>
-            <a:off x="731520" y="2697480"/>
-            <a:ext cx="2064944" cy="777240"/>
+            <a:off x="1051560" y="2514600"/>
+            <a:ext cx="1767764" cy="731520"/>
           </a:xfrm>
           <a:prstGeom prst="rect">
             <a:avLst/>
@@ -5244,7 +5244,7 @@
               <a:buNone/>
             </a:pPr>
             <a:r>
-              <a:rPr lang="en-US" sz="3200" b="1" dirty="0">
+              <a:rPr lang="en-US" sz="2600" b="1" dirty="0">
                 <a:solidFill>
                   <a:srgbClr val="2E4AED"/>
                 </a:solidFill>
@@ -5254,7 +5254,7 @@
               </a:rPr>
               <a:t>46%</a:t>
             </a:r>
-            <a:endParaRPr lang="en-US" sz="3200" dirty="0"/>
+            <a:endParaRPr lang="en-US" sz="2600" dirty="0"/>
           </a:p>
         </p:txBody>
       </p:sp>
@@ -5266,7 +5266,7 @@
         </p:nvSpPr>
         <p:spPr>
           <a:xfrm>
-            <a:off x="731520" y="3593592"/>
+            <a:off x="1051560" y="3383280"/>
             <a:ext cx="1737360" cy="347472"/>
           </a:xfrm>
           <a:prstGeom prst="roundRect">
@@ -5301,7 +5301,7 @@
         </p:blipFill>
         <p:spPr>
           <a:xfrm>
-            <a:off x="822960" y="3657600"/>
+            <a:off x="1143000" y="3447288"/>
             <a:ext cx="219456" cy="219456"/>
           </a:xfrm>
           <a:prstGeom prst="rect">
@@ -5317,7 +5317,7 @@
         </p:nvSpPr>
         <p:spPr>
           <a:xfrm>
-            <a:off x="1115568" y="3593592"/>
+            <a:off x="1435608" y="3383280"/>
             <a:ext cx="1325880" cy="347472"/>
           </a:xfrm>
           <a:prstGeom prst="rect">
@@ -5356,8 +5356,8 @@
         </p:nvSpPr>
         <p:spPr>
           <a:xfrm>
-            <a:off x="731520" y="4069080"/>
-            <a:ext cx="2064944" cy="685800"/>
+            <a:off x="1051560" y="3867912"/>
+            <a:ext cx="1767764" cy="365760"/>
           </a:xfrm>
           <a:prstGeom prst="rect">
             <a:avLst/>
@@ -5395,12 +5395,12 @@
         </p:nvSpPr>
         <p:spPr>
           <a:xfrm>
-            <a:off x="3345104" y="1783080"/>
-            <a:ext cx="2613584" cy="3108960"/>
+            <a:off x="3459404" y="1691640"/>
+            <a:ext cx="2499284" cy="2697480"/>
           </a:xfrm>
           <a:prstGeom prst="roundRect">
             <a:avLst>
-              <a:gd name="adj" fmla="val 4198"/>
+              <a:gd name="adj" fmla="val 4390"/>
             </a:avLst>
           </a:prstGeom>
           <a:solidFill>
@@ -5422,8 +5422,8 @@
         </p:nvSpPr>
         <p:spPr>
           <a:xfrm>
-            <a:off x="3619424" y="2057400"/>
-            <a:ext cx="2064944" cy="548640"/>
+            <a:off x="3825164" y="2057400"/>
+            <a:ext cx="1767764" cy="292608"/>
           </a:xfrm>
           <a:prstGeom prst="rect">
             <a:avLst/>
@@ -5461,8 +5461,8 @@
         </p:nvSpPr>
         <p:spPr>
           <a:xfrm>
-            <a:off x="3619424" y="2697480"/>
-            <a:ext cx="2064944" cy="777240"/>
+            <a:off x="3825164" y="2514600"/>
+            <a:ext cx="1767764" cy="731520"/>
           </a:xfrm>
           <a:prstGeom prst="rect">
             <a:avLst/>
@@ -5478,7 +5478,7 @@
               <a:buNone/>
             </a:pPr>
             <a:r>
-              <a:rPr lang="en-US" sz="3200" b="1" dirty="0">
+              <a:rPr lang="en-US" sz="2600" b="1" dirty="0">
                 <a:solidFill>
                   <a:srgbClr val="2E4AED"/>
                 </a:solidFill>
@@ -5488,7 +5488,7 @@
               </a:rPr>
               <a:t>–18 days</a:t>
             </a:r>
-            <a:endParaRPr lang="en-US" sz="3200" dirty="0"/>
+            <a:endParaRPr lang="en-US" sz="2600" dirty="0"/>
           </a:p>
         </p:txBody>
       </p:sp>
@@ -5500,7 +5500,7 @@
         </p:nvSpPr>
         <p:spPr>
           <a:xfrm>
-            <a:off x="3619424" y="3593592"/>
+            <a:off x="3825164" y="3383280"/>
             <a:ext cx="1737360" cy="347472"/>
           </a:xfrm>
           <a:prstGeom prst="roundRect">
@@ -5535,7 +5535,7 @@
         </p:blipFill>
         <p:spPr>
           <a:xfrm>
-            <a:off x="3710864" y="3657600"/>
+            <a:off x="3916604" y="3447288"/>
             <a:ext cx="219456" cy="219456"/>
           </a:xfrm>
           <a:prstGeom prst="rect">
@@ -5551,7 +5551,7 @@
         </p:nvSpPr>
         <p:spPr>
           <a:xfrm>
-            <a:off x="4003472" y="3593592"/>
+            <a:off x="4209212" y="3383280"/>
             <a:ext cx="1325880" cy="347472"/>
           </a:xfrm>
           <a:prstGeom prst="rect">
@@ -5590,8 +5590,8 @@
         </p:nvSpPr>
         <p:spPr>
           <a:xfrm>
-            <a:off x="3619424" y="4069080"/>
-            <a:ext cx="2064944" cy="685800"/>
+            <a:off x="3825164" y="3867912"/>
+            <a:ext cx="1767764" cy="365760"/>
           </a:xfrm>
           <a:prstGeom prst="rect">
             <a:avLst/>
@@ -5629,12 +5629,12 @@
         </p:nvSpPr>
         <p:spPr>
           <a:xfrm>
-            <a:off x="6233008" y="1783080"/>
-            <a:ext cx="2613584" cy="3108960"/>
+            <a:off x="6233008" y="1691640"/>
+            <a:ext cx="2499284" cy="2697480"/>
           </a:xfrm>
           <a:prstGeom prst="roundRect">
             <a:avLst>
-              <a:gd name="adj" fmla="val 4198"/>
+              <a:gd name="adj" fmla="val 4390"/>
             </a:avLst>
           </a:prstGeom>
           <a:solidFill>
@@ -5656,8 +5656,8 @@
         </p:nvSpPr>
         <p:spPr>
           <a:xfrm>
-            <a:off x="6507328" y="2057400"/>
-            <a:ext cx="2064944" cy="548640"/>
+            <a:off x="6598768" y="2057400"/>
+            <a:ext cx="1767764" cy="292608"/>
           </a:xfrm>
           <a:prstGeom prst="rect">
             <a:avLst/>
@@ -5695,8 +5695,8 @@
         </p:nvSpPr>
         <p:spPr>
           <a:xfrm>
-            <a:off x="6507328" y="2697480"/>
-            <a:ext cx="2064944" cy="777240"/>
+            <a:off x="6598768" y="2514600"/>
+            <a:ext cx="1767764" cy="731520"/>
           </a:xfrm>
           <a:prstGeom prst="rect">
             <a:avLst/>
@@ -5712,7 +5712,7 @@
               <a:buNone/>
             </a:pPr>
             <a:r>
-              <a:rPr lang="en-US" sz="3200" b="1" dirty="0">
+              <a:rPr lang="en-US" sz="2600" b="1" dirty="0">
                 <a:solidFill>
                   <a:srgbClr val="2E4AED"/>
                 </a:solidFill>
@@ -5722,7 +5722,7 @@
               </a:rPr>
               <a:t>5 → 2</a:t>
             </a:r>
-            <a:endParaRPr lang="en-US" sz="3200" dirty="0"/>
+            <a:endParaRPr lang="en-US" sz="2600" dirty="0"/>
           </a:p>
         </p:txBody>
       </p:sp>
@@ -5734,7 +5734,7 @@
         </p:nvSpPr>
         <p:spPr>
           <a:xfrm>
-            <a:off x="6507328" y="3593592"/>
+            <a:off x="6598768" y="3383280"/>
             <a:ext cx="1737360" cy="347472"/>
           </a:xfrm>
           <a:prstGeom prst="roundRect">
@@ -5769,7 +5769,7 @@
         </p:blipFill>
         <p:spPr>
           <a:xfrm>
-            <a:off x="6598768" y="3657600"/>
+            <a:off x="6690208" y="3447288"/>
             <a:ext cx="219456" cy="219456"/>
           </a:xfrm>
           <a:prstGeom prst="rect">
@@ -5785,7 +5785,7 @@
         </p:nvSpPr>
         <p:spPr>
           <a:xfrm>
-            <a:off x="6891376" y="3593592"/>
+            <a:off x="6982816" y="3383280"/>
             <a:ext cx="1325880" cy="347472"/>
           </a:xfrm>
           <a:prstGeom prst="rect">
@@ -5824,8 +5824,8 @@
         </p:nvSpPr>
         <p:spPr>
           <a:xfrm>
-            <a:off x="6507328" y="4069080"/>
-            <a:ext cx="2064944" cy="685800"/>
+            <a:off x="6598768" y="3867912"/>
+            <a:ext cx="1767764" cy="365760"/>
           </a:xfrm>
           <a:prstGeom prst="rect">
             <a:avLst/>
@@ -5863,12 +5863,12 @@
         </p:nvSpPr>
         <p:spPr>
           <a:xfrm>
-            <a:off x="9120911" y="1783080"/>
-            <a:ext cx="2613584" cy="3108960"/>
+            <a:off x="9006611" y="1691640"/>
+            <a:ext cx="2499284" cy="2697480"/>
           </a:xfrm>
           <a:prstGeom prst="roundRect">
             <a:avLst>
-              <a:gd name="adj" fmla="val 4198"/>
+              <a:gd name="adj" fmla="val 4390"/>
             </a:avLst>
           </a:prstGeom>
           <a:solidFill>
@@ -5890,8 +5890,8 @@
         </p:nvSpPr>
         <p:spPr>
           <a:xfrm>
-            <a:off x="9395231" y="2057400"/>
-            <a:ext cx="2064944" cy="548640"/>
+            <a:off x="9372371" y="2057400"/>
+            <a:ext cx="1767764" cy="292608"/>
           </a:xfrm>
           <a:prstGeom prst="rect">
             <a:avLst/>
@@ -5929,8 +5929,8 @@
         </p:nvSpPr>
         <p:spPr>
           <a:xfrm>
-            <a:off x="9395231" y="2697480"/>
-            <a:ext cx="2064944" cy="777240"/>
+            <a:off x="9372371" y="2514600"/>
+            <a:ext cx="1767764" cy="731520"/>
           </a:xfrm>
           <a:prstGeom prst="rect">
             <a:avLst/>
@@ -5946,7 +5946,7 @@
               <a:buNone/>
             </a:pPr>
             <a:r>
-              <a:rPr lang="en-US" sz="3200" b="1" dirty="0">
+              <a:rPr lang="en-US" sz="2600" b="1" dirty="0">
                 <a:solidFill>
                   <a:srgbClr val="2E4AED"/>
                 </a:solidFill>
@@ -5956,7 +5956,7 @@
               </a:rPr>
               <a:t>4.5</a:t>
             </a:r>
-            <a:endParaRPr lang="en-US" sz="3200" dirty="0"/>
+            <a:endParaRPr lang="en-US" sz="2600" dirty="0"/>
           </a:p>
         </p:txBody>
       </p:sp>
@@ -5968,7 +5968,7 @@
         </p:nvSpPr>
         <p:spPr>
           <a:xfrm>
-            <a:off x="9395231" y="3593592"/>
+            <a:off x="9372371" y="3383280"/>
             <a:ext cx="1737360" cy="347472"/>
           </a:xfrm>
           <a:prstGeom prst="roundRect">
@@ -6003,7 +6003,7 @@
         </p:blipFill>
         <p:spPr>
           <a:xfrm>
-            <a:off x="9486671" y="3657600"/>
+            <a:off x="9463811" y="3447288"/>
             <a:ext cx="219456" cy="219456"/>
           </a:xfrm>
           <a:prstGeom prst="rect">
@@ -6019,7 +6019,7 @@
         </p:nvSpPr>
         <p:spPr>
           <a:xfrm>
-            <a:off x="9779279" y="3593592"/>
+            <a:off x="9756419" y="3383280"/>
             <a:ext cx="1325880" cy="347472"/>
           </a:xfrm>
           <a:prstGeom prst="rect">
@@ -6058,8 +6058,8 @@
         </p:nvSpPr>
         <p:spPr>
           <a:xfrm>
-            <a:off x="9395231" y="4069080"/>
-            <a:ext cx="2064944" cy="685800"/>
+            <a:off x="9372371" y="3867912"/>
+            <a:ext cx="1767764" cy="365760"/>
           </a:xfrm>
           <a:prstGeom prst="rect">
             <a:avLst/>
@@ -6097,8 +6097,8 @@
         </p:nvSpPr>
         <p:spPr>
           <a:xfrm>
-            <a:off x="457200" y="5120640"/>
-            <a:ext cx="11277295" cy="1005840"/>
+            <a:off x="685800" y="4663440"/>
+            <a:ext cx="10820095" cy="1005840"/>
           </a:xfrm>
           <a:prstGeom prst="roundRect">
             <a:avLst>
@@ -6124,8 +6124,8 @@
         </p:nvSpPr>
         <p:spPr>
           <a:xfrm>
-            <a:off x="731520" y="5120640"/>
-            <a:ext cx="10728655" cy="1005840"/>
+            <a:off x="1051560" y="4663440"/>
+            <a:ext cx="10088575" cy="1005840"/>
           </a:xfrm>
           <a:prstGeom prst="rect">
             <a:avLst/>
@@ -6163,7 +6163,7 @@
                 <a:ea typeface="Hanken Grotesk" pitchFamily="34" charset="-122"/>
                 <a:cs typeface="Hanken Grotesk" pitchFamily="34" charset="-120"/>
               </a:rPr>
-              <a:t>Nibh euismod gravida lorem ipsum dolor sit amet consectetur adipiscing elit sed do eiusmod tempor incididunt ut labore et dolore magna aliqua ut enim ad minim.</a:t>
+              <a:t>Nibh euismod gravida lorem ipsum dolor sit amet consectetur adipiscing elit sed do eiusmod tempor incididunt ut labore.</a:t>
             </a:r>
             <a:endParaRPr lang="en-US" sz="1350" dirty="0"/>
           </a:p>
@@ -6209,8 +6209,8 @@
         </p:nvSpPr>
         <p:spPr>
           <a:xfrm>
-            <a:off x="457200" y="384048"/>
-            <a:ext cx="8961120" cy="274320"/>
+            <a:off x="685800" y="502920"/>
+            <a:ext cx="8595360" cy="274320"/>
           </a:xfrm>
           <a:prstGeom prst="rect">
             <a:avLst/>
@@ -6248,8 +6248,8 @@
         </p:nvSpPr>
         <p:spPr>
           <a:xfrm>
-            <a:off x="457200" y="676656"/>
-            <a:ext cx="11274552" cy="868680"/>
+            <a:off x="685800" y="804672"/>
+            <a:ext cx="10820095" cy="566928"/>
           </a:xfrm>
           <a:prstGeom prst="rect">
             <a:avLst/>
@@ -6268,7 +6268,7 @@
               <a:buNone/>
             </a:pPr>
             <a:r>
-              <a:rPr lang="en-US" sz="3000" b="1" dirty="0">
+              <a:rPr lang="en-US" sz="2800" b="1" dirty="0">
                 <a:solidFill>
                   <a:srgbClr val="222731"/>
                 </a:solidFill>
@@ -6276,9 +6276,9 @@
                 <a:ea typeface="Bricolage Grotesque" pitchFamily="34" charset="-122"/>
                 <a:cs typeface="Bricolage Grotesque" pitchFamily="34" charset="-120"/>
               </a:rPr>
-              <a:t>Fugiat nulla pariatur excepteur sint occaecat cupidatat non proident sunt in</a:t>
-            </a:r>
-            <a:endParaRPr lang="en-US" sz="3000" dirty="0"/>
+              <a:t>Fugiat nulla pariatur excepteur sint occaecat</a:t>
+            </a:r>
+            <a:endParaRPr lang="en-US" sz="2800" dirty="0"/>
           </a:p>
         </p:txBody>
       </p:sp>
@@ -6290,7 +6290,7 @@
         </p:nvSpPr>
         <p:spPr>
           <a:xfrm>
-            <a:off x="457200" y="6400800"/>
+            <a:off x="685800" y="6400800"/>
             <a:ext cx="4389120" cy="256032"/>
           </a:xfrm>
           <a:prstGeom prst="rect">
@@ -6330,7 +6330,7 @@
         <p:spPr>
           <a:xfrm>
             <a:off x="4937760" y="6400800"/>
-            <a:ext cx="5943600" cy="256032"/>
+            <a:ext cx="5790895" cy="256032"/>
           </a:xfrm>
           <a:prstGeom prst="rect">
             <a:avLst/>
@@ -6368,7 +6368,7 @@
         </p:nvSpPr>
         <p:spPr>
           <a:xfrm>
-            <a:off x="11091672" y="6400800"/>
+            <a:off x="10865815" y="6400800"/>
             <a:ext cx="640080" cy="256032"/>
           </a:xfrm>
           <a:prstGeom prst="rect">
@@ -6407,12 +6407,12 @@
         </p:nvSpPr>
         <p:spPr>
           <a:xfrm>
-            <a:off x="457200" y="1783080"/>
-            <a:ext cx="2926080" cy="4343400"/>
+            <a:off x="685800" y="1691640"/>
+            <a:ext cx="2743200" cy="4069080"/>
           </a:xfrm>
           <a:prstGeom prst="roundRect">
             <a:avLst>
-              <a:gd name="adj" fmla="val 3750"/>
+              <a:gd name="adj" fmla="val 4000"/>
             </a:avLst>
           </a:prstGeom>
           <a:solidFill>
@@ -6434,8 +6434,8 @@
         </p:nvSpPr>
         <p:spPr>
           <a:xfrm>
-            <a:off x="731520" y="2057400"/>
-            <a:ext cx="2377440" cy="274320"/>
+            <a:off x="1051560" y="2057400"/>
+            <a:ext cx="2011680" cy="274320"/>
           </a:xfrm>
           <a:prstGeom prst="rect">
             <a:avLst/>
@@ -6473,8 +6473,8 @@
         </p:nvSpPr>
         <p:spPr>
           <a:xfrm>
-            <a:off x="731520" y="2423160"/>
-            <a:ext cx="2377440" cy="914400"/>
+            <a:off x="1051560" y="2423160"/>
+            <a:ext cx="2011680" cy="868680"/>
           </a:xfrm>
           <a:prstGeom prst="rect">
             <a:avLst/>
@@ -6512,7 +6512,7 @@
         </p:nvSpPr>
         <p:spPr>
           <a:xfrm>
-            <a:off x="731520" y="3429000"/>
+            <a:off x="1051560" y="3383280"/>
             <a:ext cx="1600200" cy="347472"/>
           </a:xfrm>
           <a:prstGeom prst="roundRect">
@@ -6547,7 +6547,7 @@
         </p:blipFill>
         <p:spPr>
           <a:xfrm>
-            <a:off x="822960" y="3493008"/>
+            <a:off x="1143000" y="3447288"/>
             <a:ext cx="219456" cy="219456"/>
           </a:xfrm>
           <a:prstGeom prst="rect">
@@ -6563,7 +6563,7 @@
         </p:nvSpPr>
         <p:spPr>
           <a:xfrm>
-            <a:off x="1115568" y="3429000"/>
+            <a:off x="1435608" y="3383280"/>
             <a:ext cx="1188720" cy="347472"/>
           </a:xfrm>
           <a:prstGeom prst="rect">
@@ -6602,8 +6602,8 @@
         </p:nvSpPr>
         <p:spPr>
           <a:xfrm>
-            <a:off x="731520" y="3977640"/>
-            <a:ext cx="2377440" cy="1920240"/>
+            <a:off x="1051560" y="3977640"/>
+            <a:ext cx="2011680" cy="1463040"/>
           </a:xfrm>
           <a:prstGeom prst="rect">
             <a:avLst/>
@@ -6616,6 +6616,29 @@
           <a:lstStyle/>
           <a:p>
             <a:pPr indent="0" marL="0">
+              <a:spcAft>
+                <a:spcPts val="400"/>
+              </a:spcAft>
+              <a:buNone/>
+            </a:pPr>
+            <a:r>
+              <a:rPr lang="en-US" sz="1350" b="1" dirty="0">
+                <a:solidFill>
+                  <a:srgbClr val="63666A"/>
+                </a:solidFill>
+                <a:latin typeface="Hanken Grotesk" pitchFamily="34" charset="0"/>
+                <a:ea typeface="Hanken Grotesk" pitchFamily="34" charset="-122"/>
+                <a:cs typeface="Hanken Grotesk" pitchFamily="34" charset="-120"/>
+              </a:rPr>
+              <a:t>Q3 2026 vs Q3 2025</a:t>
+            </a:r>
+            <a:endParaRPr lang="en-US" sz="1350" dirty="0"/>
+          </a:p>
+          <a:p>
+            <a:pPr indent="0" marL="0">
+              <a:spcAft>
+                <a:spcPts val="400"/>
+              </a:spcAft>
               <a:buNone/>
             </a:pPr>
             <a:r>
@@ -6627,24 +6650,7 @@
                 <a:ea typeface="Hanken Grotesk" pitchFamily="34" charset="-122"/>
                 <a:cs typeface="Hanken Grotesk" pitchFamily="34" charset="-120"/>
               </a:rPr>
-              <a:t>Q3 2026 vs Q3 2025</a:t>
-            </a:r>
-            <a:endParaRPr lang="en-US" sz="1350" dirty="0"/>
-          </a:p>
-          <a:p>
-            <a:pPr indent="0" marL="0">
-              <a:buNone/>
-            </a:pPr>
-            <a:r>
-              <a:rPr lang="en-US" sz="1350" dirty="0">
-                <a:solidFill>
-                  <a:srgbClr val="63666A"/>
-                </a:solidFill>
-                <a:latin typeface="Hanken Grotesk" pitchFamily="34" charset="0"/>
-                <a:ea typeface="Hanken Grotesk" pitchFamily="34" charset="-122"/>
-                <a:cs typeface="Hanken Grotesk" pitchFamily="34" charset="-120"/>
-              </a:rPr>
-              <a:t>Non proident sunt in culpa qui officia deserunt mollit anim id est.</a:t>
+              <a:t>Non proident sunt in culpa qui officia deserunt mollit.</a:t>
             </a:r>
             <a:endParaRPr lang="en-US" sz="1350" dirty="0"/>
           </a:p>
@@ -6658,12 +6664,12 @@
         </p:nvSpPr>
         <p:spPr>
           <a:xfrm>
-            <a:off x="3657600" y="1783080"/>
-            <a:ext cx="5166360" cy="4343400"/>
+            <a:off x="3703320" y="1691640"/>
+            <a:ext cx="4785055" cy="4069080"/>
           </a:xfrm>
           <a:prstGeom prst="roundRect">
             <a:avLst>
-              <a:gd name="adj" fmla="val 2526"/>
+              <a:gd name="adj" fmla="val 2697"/>
             </a:avLst>
           </a:prstGeom>
           <a:solidFill>
@@ -6685,8 +6691,8 @@
         </p:nvSpPr>
         <p:spPr>
           <a:xfrm>
-            <a:off x="3931920" y="2011680"/>
-            <a:ext cx="4572000" cy="274320"/>
+            <a:off x="4069080" y="2011680"/>
+            <a:ext cx="4053535" cy="274320"/>
           </a:xfrm>
           <a:prstGeom prst="rect">
             <a:avLst/>
@@ -6723,8 +6729,8 @@
           <p:nvPr/>
         </p:nvGraphicFramePr>
         <p:xfrm>
-          <a:off x="3840480" y="2331720"/>
-          <a:ext cx="4846320" cy="3657600"/>
+          <a:off x="3886200" y="2377440"/>
+          <a:ext cx="4419295" cy="3154680"/>
         </p:xfrm>
         <a:graphic xmlns:a="http://schemas.openxmlformats.org/drawingml/2006/main">
           <a:graphicData uri="http://schemas.openxmlformats.org/drawingml/2006/chart">
@@ -6740,12 +6746,12 @@
         </p:nvSpPr>
         <p:spPr>
           <a:xfrm>
-            <a:off x="9098280" y="1783080"/>
-            <a:ext cx="2636215" cy="4343400"/>
+            <a:off x="8762695" y="1691640"/>
+            <a:ext cx="2743200" cy="4069080"/>
           </a:xfrm>
           <a:prstGeom prst="roundRect">
             <a:avLst>
-              <a:gd name="adj" fmla="val 4162"/>
+              <a:gd name="adj" fmla="val 4000"/>
             </a:avLst>
           </a:prstGeom>
           <a:solidFill>
@@ -6767,8 +6773,8 @@
         </p:nvSpPr>
         <p:spPr>
           <a:xfrm>
-            <a:off x="9372600" y="2057400"/>
-            <a:ext cx="2103120" cy="274320"/>
+            <a:off x="9128455" y="2057400"/>
+            <a:ext cx="2011680" cy="274320"/>
           </a:xfrm>
           <a:prstGeom prst="rect">
             <a:avLst/>
@@ -6806,8 +6812,8 @@
         </p:nvSpPr>
         <p:spPr>
           <a:xfrm>
-            <a:off x="9372600" y="2377440"/>
-            <a:ext cx="2103120" cy="1645920"/>
+            <a:off x="9128455" y="2423160"/>
+            <a:ext cx="2011680" cy="1371600"/>
           </a:xfrm>
           <a:prstGeom prst="rect">
             <a:avLst/>
@@ -6831,7 +6837,7 @@
                 <a:ea typeface="Bricolage Grotesque" pitchFamily="34" charset="-122"/>
                 <a:cs typeface="Bricolage Grotesque" pitchFamily="34" charset="-120"/>
               </a:rPr>
-              <a:t>Tempor incididunt ut labore et dolore magna aliqua ut enim ad minim.</a:t>
+              <a:t>Tempor incididunt ut labore et dolore magna aliqua ut.</a:t>
             </a:r>
             <a:endParaRPr lang="en-US" sz="1700" dirty="0"/>
           </a:p>
@@ -6845,8 +6851,8 @@
         </p:nvSpPr>
         <p:spPr>
           <a:xfrm>
-            <a:off x="9372600" y="4206240"/>
-            <a:ext cx="2103120" cy="274320"/>
+            <a:off x="9128455" y="4023360"/>
+            <a:ext cx="2011680" cy="274320"/>
           </a:xfrm>
           <a:prstGeom prst="rect">
             <a:avLst/>
@@ -6884,8 +6890,8 @@
         </p:nvSpPr>
         <p:spPr>
           <a:xfrm>
-            <a:off x="9372600" y="4526280"/>
-            <a:ext cx="2103120" cy="1463040"/>
+            <a:off x="9128455" y="4343400"/>
+            <a:ext cx="2011680" cy="1097280"/>
           </a:xfrm>
           <a:prstGeom prst="rect">
             <a:avLst/>
@@ -6909,7 +6915,7 @@
                 <a:ea typeface="Hanken Grotesk" pitchFamily="34" charset="-122"/>
                 <a:cs typeface="Hanken Grotesk" pitchFamily="34" charset="-120"/>
               </a:rPr>
-              <a:t>Sint occaecat cupidatat non proident sunt in culpa qui officia deserunt mollit anim id.</a:t>
+              <a:t>Sint occaecat cupidatat non proident sunt in culpa qui officia.</a:t>
             </a:r>
             <a:endParaRPr lang="en-US" sz="1350" dirty="0"/>
           </a:p>
@@ -6955,8 +6961,8 @@
         </p:nvSpPr>
         <p:spPr>
           <a:xfrm>
-            <a:off x="457200" y="384048"/>
-            <a:ext cx="8961120" cy="274320"/>
+            <a:off x="685800" y="502920"/>
+            <a:ext cx="8595360" cy="274320"/>
           </a:xfrm>
           <a:prstGeom prst="rect">
             <a:avLst/>
@@ -6994,8 +7000,8 @@
         </p:nvSpPr>
         <p:spPr>
           <a:xfrm>
-            <a:off x="457200" y="676656"/>
-            <a:ext cx="11274552" cy="868680"/>
+            <a:off x="685800" y="804672"/>
+            <a:ext cx="10820095" cy="566928"/>
           </a:xfrm>
           <a:prstGeom prst="rect">
             <a:avLst/>
@@ -7014,7 +7020,7 @@
               <a:buNone/>
             </a:pPr>
             <a:r>
-              <a:rPr lang="en-US" sz="3000" b="1" dirty="0">
+              <a:rPr lang="en-US" sz="2800" b="1" dirty="0">
                 <a:solidFill>
                   <a:srgbClr val="222731"/>
                 </a:solidFill>
@@ -7022,9 +7028,9 @@
                 <a:ea typeface="Bricolage Grotesque" pitchFamily="34" charset="-122"/>
                 <a:cs typeface="Bricolage Grotesque" pitchFamily="34" charset="-120"/>
               </a:rPr>
-              <a:t>Pretium tincidunt lacus nulla gravida orci a odio nullam</a:t>
-            </a:r>
-            <a:endParaRPr lang="en-US" sz="3000" dirty="0"/>
+              <a:t>Pretium tincidunt lacus nulla gravida orci a</a:t>
+            </a:r>
+            <a:endParaRPr lang="en-US" sz="2800" dirty="0"/>
           </a:p>
         </p:txBody>
       </p:sp>
@@ -7036,7 +7042,7 @@
         </p:nvSpPr>
         <p:spPr>
           <a:xfrm>
-            <a:off x="457200" y="6400800"/>
+            <a:off x="685800" y="6400800"/>
             <a:ext cx="4389120" cy="256032"/>
           </a:xfrm>
           <a:prstGeom prst="rect">
@@ -7076,7 +7082,7 @@
         <p:spPr>
           <a:xfrm>
             <a:off x="4937760" y="6400800"/>
-            <a:ext cx="5943600" cy="256032"/>
+            <a:ext cx="5790895" cy="256032"/>
           </a:xfrm>
           <a:prstGeom prst="rect">
             <a:avLst/>
@@ -7114,7 +7120,7 @@
         </p:nvSpPr>
         <p:spPr>
           <a:xfrm>
-            <a:off x="11091672" y="6400800"/>
+            <a:off x="10865815" y="6400800"/>
             <a:ext cx="640080" cy="256032"/>
           </a:xfrm>
           <a:prstGeom prst="rect">
@@ -7153,12 +7159,12 @@
         </p:nvSpPr>
         <p:spPr>
           <a:xfrm>
-            <a:off x="457200" y="1783080"/>
-            <a:ext cx="7863840" cy="4343400"/>
+            <a:off x="685800" y="1691640"/>
+            <a:ext cx="7436815" cy="4069080"/>
           </a:xfrm>
           <a:prstGeom prst="roundRect">
             <a:avLst>
-              <a:gd name="adj" fmla="val 2526"/>
+              <a:gd name="adj" fmla="val 2697"/>
             </a:avLst>
           </a:prstGeom>
           <a:solidFill>
@@ -7180,8 +7186,8 @@
         </p:nvSpPr>
         <p:spPr>
           <a:xfrm>
-            <a:off x="731520" y="2011680"/>
-            <a:ext cx="7315200" cy="274320"/>
+            <a:off x="1051560" y="2011680"/>
+            <a:ext cx="6705295" cy="274320"/>
           </a:xfrm>
           <a:prstGeom prst="rect">
             <a:avLst/>
@@ -7218,8 +7224,8 @@
           <p:nvPr/>
         </p:nvGraphicFramePr>
         <p:xfrm>
-          <a:off x="640080" y="2331720"/>
-          <a:ext cx="7498080" cy="3657600"/>
+          <a:off x="914400" y="2377440"/>
+          <a:ext cx="6979615" cy="3154680"/>
         </p:xfrm>
         <a:graphic xmlns:a="http://schemas.openxmlformats.org/drawingml/2006/main">
           <a:graphicData uri="http://schemas.openxmlformats.org/drawingml/2006/chart">
@@ -7235,12 +7241,12 @@
         </p:nvSpPr>
         <p:spPr>
           <a:xfrm>
-            <a:off x="8595360" y="1783080"/>
-            <a:ext cx="3139135" cy="4343400"/>
+            <a:off x="8396935" y="1691640"/>
+            <a:ext cx="3108960" cy="4069080"/>
           </a:xfrm>
           <a:prstGeom prst="roundRect">
             <a:avLst>
-              <a:gd name="adj" fmla="val 3495"/>
+              <a:gd name="adj" fmla="val 3529"/>
             </a:avLst>
           </a:prstGeom>
           <a:solidFill>
@@ -7262,8 +7268,8 @@
         </p:nvSpPr>
         <p:spPr>
           <a:xfrm>
-            <a:off x="8869680" y="2103120"/>
-            <a:ext cx="2743200" cy="822960"/>
+            <a:off x="8762695" y="2057400"/>
+            <a:ext cx="2377440" cy="822960"/>
           </a:xfrm>
           <a:prstGeom prst="rect">
             <a:avLst/>
@@ -7301,8 +7307,8 @@
         </p:nvSpPr>
         <p:spPr>
           <a:xfrm>
-            <a:off x="8869680" y="2926080"/>
-            <a:ext cx="2743200" cy="274320"/>
+            <a:off x="8762695" y="2880360"/>
+            <a:ext cx="2377440" cy="274320"/>
           </a:xfrm>
           <a:prstGeom prst="rect">
             <a:avLst/>
@@ -7340,7 +7346,7 @@
         </p:nvSpPr>
         <p:spPr>
           <a:xfrm>
-            <a:off x="8869680" y="3429000"/>
+            <a:off x="8762695" y="3429000"/>
             <a:ext cx="1280160" cy="310896"/>
           </a:xfrm>
           <a:prstGeom prst="roundRect">
@@ -7367,7 +7373,7 @@
         </p:nvSpPr>
         <p:spPr>
           <a:xfrm>
-            <a:off x="8869680" y="3429000"/>
+            <a:off x="8762695" y="3429000"/>
             <a:ext cx="1280160" cy="310896"/>
           </a:xfrm>
           <a:prstGeom prst="rect">
@@ -7406,8 +7412,8 @@
         </p:nvSpPr>
         <p:spPr>
           <a:xfrm>
-            <a:off x="8869680" y="3886200"/>
-            <a:ext cx="2834640" cy="2103120"/>
+            <a:off x="8762695" y="3931920"/>
+            <a:ext cx="2377440" cy="1463040"/>
           </a:xfrm>
           <a:prstGeom prst="rect">
             <a:avLst/>
@@ -7431,7 +7437,7 @@
                 <a:ea typeface="Hanken Grotesk" pitchFamily="34" charset="-122"/>
                 <a:cs typeface="Hanken Grotesk" pitchFamily="34" charset="-120"/>
               </a:rPr>
-              <a:t>Odio nullam varius turpis et commodo pharetra est eros bibendum elit nec luctus magna felis sollicitudin mauris integer in mauris eu nibh euismod gravida.</a:t>
+              <a:t>Odio nullam varius turpis et commodo pharetra est eros bibendum elit nec luctus magna felis sollicitudin.</a:t>
             </a:r>
             <a:endParaRPr lang="en-US" sz="1350" dirty="0"/>
           </a:p>
@@ -7477,8 +7483,8 @@
         </p:nvSpPr>
         <p:spPr>
           <a:xfrm>
-            <a:off x="457200" y="384048"/>
-            <a:ext cx="8961120" cy="274320"/>
+            <a:off x="685800" y="502920"/>
+            <a:ext cx="8595360" cy="274320"/>
           </a:xfrm>
           <a:prstGeom prst="rect">
             <a:avLst/>
@@ -7516,8 +7522,8 @@
         </p:nvSpPr>
         <p:spPr>
           <a:xfrm>
-            <a:off x="457200" y="676656"/>
-            <a:ext cx="11274552" cy="868680"/>
+            <a:off x="685800" y="804672"/>
+            <a:ext cx="10820095" cy="566928"/>
           </a:xfrm>
           <a:prstGeom prst="rect">
             <a:avLst/>
@@ -7536,7 +7542,7 @@
               <a:buNone/>
             </a:pPr>
             <a:r>
-              <a:rPr lang="en-US" sz="3000" b="1" dirty="0">
+              <a:rPr lang="en-US" sz="2800" b="1" dirty="0">
                 <a:solidFill>
                   <a:srgbClr val="222731"/>
                 </a:solidFill>
@@ -7544,9 +7550,9 @@
                 <a:ea typeface="Bricolage Grotesque" pitchFamily="34" charset="-122"/>
                 <a:cs typeface="Bricolage Grotesque" pitchFamily="34" charset="-120"/>
               </a:rPr>
-              <a:t>Felis sollicitudin mauris integer in mauris eu nibh euismod gravida</a:t>
-            </a:r>
-            <a:endParaRPr lang="en-US" sz="3000" dirty="0"/>
+              <a:t>Felis sollicitudin mauris integer in mauris</a:t>
+            </a:r>
+            <a:endParaRPr lang="en-US" sz="2800" dirty="0"/>
           </a:p>
         </p:txBody>
       </p:sp>
@@ -7558,7 +7564,7 @@
         </p:nvSpPr>
         <p:spPr>
           <a:xfrm>
-            <a:off x="457200" y="6400800"/>
+            <a:off x="685800" y="6400800"/>
             <a:ext cx="4389120" cy="256032"/>
           </a:xfrm>
           <a:prstGeom prst="rect">
@@ -7598,7 +7604,7 @@
         <p:spPr>
           <a:xfrm>
             <a:off x="4937760" y="6400800"/>
-            <a:ext cx="5943600" cy="256032"/>
+            <a:ext cx="5790895" cy="256032"/>
           </a:xfrm>
           <a:prstGeom prst="rect">
             <a:avLst/>
@@ -7636,7 +7642,7 @@
         </p:nvSpPr>
         <p:spPr>
           <a:xfrm>
-            <a:off x="11091672" y="6400800"/>
+            <a:off x="10865815" y="6400800"/>
             <a:ext cx="640080" cy="256032"/>
           </a:xfrm>
           <a:prstGeom prst="rect">
@@ -7675,12 +7681,12 @@
         </p:nvSpPr>
         <p:spPr>
           <a:xfrm>
-            <a:off x="457200" y="1783080"/>
-            <a:ext cx="3576218" cy="4343400"/>
+            <a:off x="685800" y="1691640"/>
+            <a:ext cx="3423818" cy="4069080"/>
           </a:xfrm>
           <a:prstGeom prst="roundRect">
             <a:avLst>
-              <a:gd name="adj" fmla="val 3068"/>
+              <a:gd name="adj" fmla="val 3205"/>
             </a:avLst>
           </a:prstGeom>
           <a:solidFill>
@@ -7702,8 +7708,8 @@
         </p:nvSpPr>
         <p:spPr>
           <a:xfrm>
-            <a:off x="777240" y="2103120"/>
-            <a:ext cx="658368" cy="658368"/>
+            <a:off x="1051560" y="2057400"/>
+            <a:ext cx="585216" cy="585216"/>
           </a:xfrm>
           <a:prstGeom prst="roundRect">
             <a:avLst>
@@ -7737,8 +7743,8 @@
         </p:blipFill>
         <p:spPr>
           <a:xfrm>
-            <a:off x="908914" y="2234794"/>
-            <a:ext cx="395021" cy="395021"/>
+            <a:off x="1168603" y="2174443"/>
+            <a:ext cx="351130" cy="351130"/>
           </a:xfrm>
           <a:prstGeom prst="rect">
             <a:avLst/>
@@ -7753,8 +7759,8 @@
         </p:nvSpPr>
         <p:spPr>
           <a:xfrm>
-            <a:off x="777240" y="2953512"/>
-            <a:ext cx="2936138" cy="274320"/>
+            <a:off x="1051560" y="2880360"/>
+            <a:ext cx="2692298" cy="274320"/>
           </a:xfrm>
           <a:prstGeom prst="rect">
             <a:avLst/>
@@ -7792,8 +7798,8 @@
         </p:nvSpPr>
         <p:spPr>
           <a:xfrm>
-            <a:off x="777240" y="3246120"/>
-            <a:ext cx="2936138" cy="731520"/>
+            <a:off x="1051560" y="3200400"/>
+            <a:ext cx="2692298" cy="731520"/>
           </a:xfrm>
           <a:prstGeom prst="rect">
             <a:avLst/>
@@ -7809,7 +7815,7 @@
               <a:buNone/>
             </a:pPr>
             <a:r>
-              <a:rPr lang="en-US" sz="2000" b="1" dirty="0">
+              <a:rPr lang="en-US" sz="1900" b="1" dirty="0">
                 <a:solidFill>
                   <a:srgbClr val="222731"/>
                 </a:solidFill>
@@ -7819,7 +7825,7 @@
               </a:rPr>
               <a:t>Exercitation ullamco laboris nisi</a:t>
             </a:r>
-            <a:endParaRPr lang="en-US" sz="2000" dirty="0"/>
+            <a:endParaRPr lang="en-US" sz="1900" dirty="0"/>
           </a:p>
         </p:txBody>
       </p:sp>
@@ -7831,8 +7837,8 @@
         </p:nvSpPr>
         <p:spPr>
           <a:xfrm>
-            <a:off x="777240" y="4069080"/>
-            <a:ext cx="2936138" cy="1828800"/>
+            <a:off x="1051560" y="4023360"/>
+            <a:ext cx="2692298" cy="1371600"/>
           </a:xfrm>
           <a:prstGeom prst="rect">
             <a:avLst/>
@@ -7856,7 +7862,7 @@
                 <a:ea typeface="Hanken Grotesk" pitchFamily="34" charset="-122"/>
                 <a:cs typeface="Hanken Grotesk" pitchFamily="34" charset="-120"/>
               </a:rPr>
-              <a:t>Dolor sit amet consectetur adipiscing elit sed do eiusmod tempor incididunt ut labore et dolore magna aliqua ut enim ad minim veniam quis nostrud exercitation ullamco laboris nisi ut aliquip.</a:t>
+              <a:t>Dolor sit amet consectetur adipiscing elit sed do eiusmod tempor incididunt ut labore et dolore magna aliqua ut enim ad.</a:t>
             </a:r>
             <a:endParaRPr lang="en-US" sz="1350" dirty="0"/>
           </a:p>
@@ -7870,12 +7876,12 @@
         </p:nvSpPr>
         <p:spPr>
           <a:xfrm>
-            <a:off x="4307738" y="1783080"/>
-            <a:ext cx="3576218" cy="4343400"/>
+            <a:off x="4383938" y="1691640"/>
+            <a:ext cx="3423818" cy="4069080"/>
           </a:xfrm>
           <a:prstGeom prst="roundRect">
             <a:avLst>
-              <a:gd name="adj" fmla="val 3068"/>
+              <a:gd name="adj" fmla="val 3205"/>
             </a:avLst>
           </a:prstGeom>
           <a:solidFill>
@@ -7897,8 +7903,8 @@
         </p:nvSpPr>
         <p:spPr>
           <a:xfrm>
-            <a:off x="4627778" y="2103120"/>
-            <a:ext cx="658368" cy="658368"/>
+            <a:off x="4749698" y="2057400"/>
+            <a:ext cx="585216" cy="585216"/>
           </a:xfrm>
           <a:prstGeom prst="roundRect">
             <a:avLst>
@@ -7932,8 +7938,8 @@
         </p:blipFill>
         <p:spPr>
           <a:xfrm>
-            <a:off x="4759452" y="2234794"/>
-            <a:ext cx="395021" cy="395021"/>
+            <a:off x="4866742" y="2174443"/>
+            <a:ext cx="351130" cy="351130"/>
           </a:xfrm>
           <a:prstGeom prst="rect">
             <a:avLst/>
@@ -7948,8 +7954,8 @@
         </p:nvSpPr>
         <p:spPr>
           <a:xfrm>
-            <a:off x="4627778" y="2953512"/>
-            <a:ext cx="2936138" cy="274320"/>
+            <a:off x="4749698" y="2880360"/>
+            <a:ext cx="2692298" cy="274320"/>
           </a:xfrm>
           <a:prstGeom prst="rect">
             <a:avLst/>
@@ -7987,8 +7993,8 @@
         </p:nvSpPr>
         <p:spPr>
           <a:xfrm>
-            <a:off x="4627778" y="3246120"/>
-            <a:ext cx="2936138" cy="731520"/>
+            <a:off x="4749698" y="3200400"/>
+            <a:ext cx="2692298" cy="731520"/>
           </a:xfrm>
           <a:prstGeom prst="rect">
             <a:avLst/>
@@ -8004,7 +8010,7 @@
               <a:buNone/>
             </a:pPr>
             <a:r>
-              <a:rPr lang="en-US" sz="2000" b="1" dirty="0">
+              <a:rPr lang="en-US" sz="1900" b="1" dirty="0">
                 <a:solidFill>
                   <a:srgbClr val="222731"/>
                 </a:solidFill>
@@ -8014,7 +8020,7 @@
               </a:rPr>
               <a:t>Qui officia deserunt mollit</a:t>
             </a:r>
-            <a:endParaRPr lang="en-US" sz="2000" dirty="0"/>
+            <a:endParaRPr lang="en-US" sz="1900" dirty="0"/>
           </a:p>
         </p:txBody>
       </p:sp>
@@ -8026,8 +8032,8 @@
         </p:nvSpPr>
         <p:spPr>
           <a:xfrm>
-            <a:off x="4627778" y="4069080"/>
-            <a:ext cx="2936138" cy="1828800"/>
+            <a:off x="4749698" y="4023360"/>
+            <a:ext cx="2692298" cy="1371600"/>
           </a:xfrm>
           <a:prstGeom prst="rect">
             <a:avLst/>
@@ -8051,7 +8057,7 @@
                 <a:ea typeface="Hanken Grotesk" pitchFamily="34" charset="-122"/>
                 <a:cs typeface="Hanken Grotesk" pitchFamily="34" charset="-120"/>
               </a:rPr>
-              <a:t>Ut aliquip ex ea commodo consequat duis aute irure dolor in reprehenderit in voluptate velit esse cillum dolore eu fugiat nulla pariatur excepteur sint occaecat cupidatat non proident sunt in.</a:t>
+              <a:t>Ut aliquip ex ea commodo consequat duis aute irure dolor in reprehenderit in voluptate velit esse cillum dolore eu fugiat.</a:t>
             </a:r>
             <a:endParaRPr lang="en-US" sz="1350" dirty="0"/>
           </a:p>
@@ -8065,12 +8071,12 @@
         </p:nvSpPr>
         <p:spPr>
           <a:xfrm>
-            <a:off x="8158277" y="1783080"/>
-            <a:ext cx="3576218" cy="4343400"/>
+            <a:off x="8082077" y="1691640"/>
+            <a:ext cx="3423818" cy="4069080"/>
           </a:xfrm>
           <a:prstGeom prst="roundRect">
             <a:avLst>
-              <a:gd name="adj" fmla="val 3068"/>
+              <a:gd name="adj" fmla="val 3205"/>
             </a:avLst>
           </a:prstGeom>
           <a:solidFill>
@@ -8092,8 +8098,8 @@
         </p:nvSpPr>
         <p:spPr>
           <a:xfrm>
-            <a:off x="8478317" y="2103120"/>
-            <a:ext cx="658368" cy="658368"/>
+            <a:off x="8447837" y="2057400"/>
+            <a:ext cx="585216" cy="585216"/>
           </a:xfrm>
           <a:prstGeom prst="roundRect">
             <a:avLst>
@@ -8127,8 +8133,8 @@
         </p:blipFill>
         <p:spPr>
           <a:xfrm>
-            <a:off x="8609990" y="2234794"/>
-            <a:ext cx="395021" cy="395021"/>
+            <a:off x="8564880" y="2174443"/>
+            <a:ext cx="351130" cy="351130"/>
           </a:xfrm>
           <a:prstGeom prst="rect">
             <a:avLst/>
@@ -8143,8 +8149,8 @@
         </p:nvSpPr>
         <p:spPr>
           <a:xfrm>
-            <a:off x="8478317" y="2953512"/>
-            <a:ext cx="2936138" cy="274320"/>
+            <a:off x="8447837" y="2880360"/>
+            <a:ext cx="2692298" cy="274320"/>
           </a:xfrm>
           <a:prstGeom prst="rect">
             <a:avLst/>
@@ -8182,8 +8188,8 @@
         </p:nvSpPr>
         <p:spPr>
           <a:xfrm>
-            <a:off x="8478317" y="3246120"/>
-            <a:ext cx="2936138" cy="731520"/>
+            <a:off x="8447837" y="3200400"/>
+            <a:ext cx="2692298" cy="731520"/>
           </a:xfrm>
           <a:prstGeom prst="rect">
             <a:avLst/>
@@ -8199,7 +8205,7 @@
               <a:buNone/>
             </a:pPr>
             <a:r>
-              <a:rPr lang="en-US" sz="2000" b="1" dirty="0">
+              <a:rPr lang="en-US" sz="1900" b="1" dirty="0">
                 <a:solidFill>
                   <a:srgbClr val="222731"/>
                 </a:solidFill>
@@ -8209,7 +8215,7 @@
               </a:rPr>
               <a:t>Mauris eu nibh euismod</a:t>
             </a:r>
-            <a:endParaRPr lang="en-US" sz="2000" dirty="0"/>
+            <a:endParaRPr lang="en-US" sz="1900" dirty="0"/>
           </a:p>
         </p:txBody>
       </p:sp>
@@ -8221,8 +8227,8 @@
         </p:nvSpPr>
         <p:spPr>
           <a:xfrm>
-            <a:off x="8478317" y="4069080"/>
-            <a:ext cx="2936138" cy="1828800"/>
+            <a:off x="8447837" y="4023360"/>
+            <a:ext cx="2692298" cy="1371600"/>
           </a:xfrm>
           <a:prstGeom prst="rect">
             <a:avLst/>
@@ -8246,7 +8252,7 @@
                 <a:ea typeface="Hanken Grotesk" pitchFamily="34" charset="-122"/>
                 <a:cs typeface="Hanken Grotesk" pitchFamily="34" charset="-120"/>
               </a:rPr>
-              <a:t>Sunt in culpa qui officia deserunt mollit anim id est laborum curabitur pretium tincidunt lacus nulla gravida orci a odio nullam varius turpis et commodo pharetra est eros bibendum elit.</a:t>
+              <a:t>Sunt in culpa qui officia deserunt mollit anim id est laborum curabitur pretium tincidunt lacus nulla gravida orci a odio.</a:t>
             </a:r>
             <a:endParaRPr lang="en-US" sz="1350" dirty="0"/>
           </a:p>
@@ -8292,8 +8298,8 @@
         </p:nvSpPr>
         <p:spPr>
           <a:xfrm>
-            <a:off x="457200" y="384048"/>
-            <a:ext cx="8961120" cy="274320"/>
+            <a:off x="685800" y="502920"/>
+            <a:ext cx="8595360" cy="274320"/>
           </a:xfrm>
           <a:prstGeom prst="rect">
             <a:avLst/>
@@ -8331,8 +8337,8 @@
         </p:nvSpPr>
         <p:spPr>
           <a:xfrm>
-            <a:off x="457200" y="676656"/>
-            <a:ext cx="11274552" cy="868680"/>
+            <a:off x="685800" y="804672"/>
+            <a:ext cx="10820095" cy="566928"/>
           </a:xfrm>
           <a:prstGeom prst="rect">
             <a:avLst/>
@@ -8351,7 +8357,7 @@
               <a:buNone/>
             </a:pPr>
             <a:r>
-              <a:rPr lang="en-US" sz="3000" b="1" dirty="0">
+              <a:rPr lang="en-US" sz="2800" b="1" dirty="0">
                 <a:solidFill>
                   <a:srgbClr val="222731"/>
                 </a:solidFill>
@@ -8359,9 +8365,9 @@
                 <a:ea typeface="Bricolage Grotesque" pitchFamily="34" charset="-122"/>
                 <a:cs typeface="Bricolage Grotesque" pitchFamily="34" charset="-120"/>
               </a:rPr>
-              <a:t>Tempor incididunt ut labore et dolore magna aliqua ut enim ad</a:t>
-            </a:r>
-            <a:endParaRPr lang="en-US" sz="3000" dirty="0"/>
+              <a:t>Tempor incididunt ut labore et dolore magna</a:t>
+            </a:r>
+            <a:endParaRPr lang="en-US" sz="2800" dirty="0"/>
           </a:p>
         </p:txBody>
       </p:sp>
@@ -8373,7 +8379,7 @@
         </p:nvSpPr>
         <p:spPr>
           <a:xfrm>
-            <a:off x="457200" y="6400800"/>
+            <a:off x="685800" y="6400800"/>
             <a:ext cx="4389120" cy="256032"/>
           </a:xfrm>
           <a:prstGeom prst="rect">
@@ -8413,7 +8419,7 @@
         <p:spPr>
           <a:xfrm>
             <a:off x="4937760" y="6400800"/>
-            <a:ext cx="5943600" cy="256032"/>
+            <a:ext cx="5790895" cy="256032"/>
           </a:xfrm>
           <a:prstGeom prst="rect">
             <a:avLst/>
@@ -8451,7 +8457,7 @@
         </p:nvSpPr>
         <p:spPr>
           <a:xfrm>
-            <a:off x="11091672" y="6400800"/>
+            <a:off x="10865815" y="6400800"/>
             <a:ext cx="640080" cy="256032"/>
           </a:xfrm>
           <a:prstGeom prst="rect">
@@ -8490,12 +8496,12 @@
         </p:nvSpPr>
         <p:spPr>
           <a:xfrm>
-            <a:off x="1005840" y="1783080"/>
-            <a:ext cx="6583680" cy="4160520"/>
+            <a:off x="1143000" y="1691640"/>
+            <a:ext cx="6035040" cy="3703320"/>
           </a:xfrm>
           <a:prstGeom prst="roundRect">
             <a:avLst>
-              <a:gd name="adj" fmla="val 2637"/>
+              <a:gd name="adj" fmla="val 2963"/>
             </a:avLst>
           </a:prstGeom>
           <a:solidFill>
@@ -8517,12 +8523,12 @@
         </p:nvSpPr>
         <p:spPr>
           <a:xfrm>
-            <a:off x="1024128" y="1801368"/>
-            <a:ext cx="3273552" cy="2061972"/>
+            <a:off x="1161288" y="1709928"/>
+            <a:ext cx="2999232" cy="1833372"/>
           </a:xfrm>
           <a:prstGeom prst="roundRect">
             <a:avLst>
-              <a:gd name="adj" fmla="val 4435"/>
+              <a:gd name="adj" fmla="val 4988"/>
             </a:avLst>
           </a:prstGeom>
           <a:solidFill>
@@ -8544,8 +8550,8 @@
         </p:nvSpPr>
         <p:spPr>
           <a:xfrm>
-            <a:off x="4297680" y="1783080"/>
-            <a:ext cx="0" cy="4160520"/>
+            <a:off x="4160520" y="1691640"/>
+            <a:ext cx="0" cy="3703320"/>
           </a:xfrm>
           <a:prstGeom prst="line">
             <a:avLst/>
@@ -8567,8 +8573,8 @@
         </p:nvSpPr>
         <p:spPr>
           <a:xfrm>
-            <a:off x="1005840" y="3863340"/>
-            <a:ext cx="6583680" cy="0"/>
+            <a:off x="1143000" y="3543300"/>
+            <a:ext cx="6035040" cy="0"/>
           </a:xfrm>
           <a:prstGeom prst="line">
             <a:avLst/>
@@ -8590,7 +8596,7 @@
         </p:nvSpPr>
         <p:spPr>
           <a:xfrm>
-            <a:off x="1188720" y="1920240"/>
+            <a:off x="1371600" y="1874520"/>
             <a:ext cx="2286000" cy="274320"/>
           </a:xfrm>
           <a:prstGeom prst="rect">
@@ -8629,7 +8635,7 @@
         </p:nvSpPr>
         <p:spPr>
           <a:xfrm>
-            <a:off x="4480560" y="1920240"/>
+            <a:off x="4389120" y="1874520"/>
             <a:ext cx="2286000" cy="274320"/>
           </a:xfrm>
           <a:prstGeom prst="rect">
@@ -8668,7 +8674,7 @@
         </p:nvSpPr>
         <p:spPr>
           <a:xfrm>
-            <a:off x="1188720" y="4000500"/>
+            <a:off x="1371600" y="3726180"/>
             <a:ext cx="2286000" cy="274320"/>
           </a:xfrm>
           <a:prstGeom prst="rect">
@@ -8707,7 +8713,7 @@
         </p:nvSpPr>
         <p:spPr>
           <a:xfrm>
-            <a:off x="4480560" y="4000500"/>
+            <a:off x="4389120" y="3726180"/>
             <a:ext cx="2286000" cy="274320"/>
           </a:xfrm>
           <a:prstGeom prst="rect">
@@ -8746,7 +8752,7 @@
         </p:nvSpPr>
         <p:spPr>
           <a:xfrm rot="16200000">
-            <a:off x="411480" y="3726180"/>
+            <a:off x="548640" y="3406140"/>
             <a:ext cx="640080" cy="274320"/>
           </a:xfrm>
           <a:prstGeom prst="rect">
@@ -8785,7 +8791,7 @@
         </p:nvSpPr>
         <p:spPr>
           <a:xfrm>
-            <a:off x="3749040" y="6035040"/>
+            <a:off x="3611880" y="5486400"/>
             <a:ext cx="1097280" cy="274320"/>
           </a:xfrm>
           <a:prstGeom prst="rect">
@@ -8824,7 +8830,7 @@
         </p:nvSpPr>
         <p:spPr>
           <a:xfrm>
-            <a:off x="2008022" y="2432304"/>
+            <a:off x="2167128" y="2323490"/>
             <a:ext cx="365760" cy="365760"/>
           </a:xfrm>
           <a:prstGeom prst="ellipse">
@@ -8849,7 +8855,7 @@
         </p:nvSpPr>
         <p:spPr>
           <a:xfrm>
-            <a:off x="2008022" y="2432304"/>
+            <a:off x="2167128" y="2323490"/>
             <a:ext cx="365760" cy="365760"/>
           </a:xfrm>
           <a:prstGeom prst="rect">
@@ -8888,7 +8894,7 @@
         </p:nvSpPr>
         <p:spPr>
           <a:xfrm>
-            <a:off x="3127248" y="2973172"/>
+            <a:off x="3132734" y="2841955"/>
             <a:ext cx="365760" cy="365760"/>
           </a:xfrm>
           <a:prstGeom prst="ellipse">
@@ -8913,7 +8919,7 @@
         </p:nvSpPr>
         <p:spPr>
           <a:xfrm>
-            <a:off x="3127248" y="2973172"/>
+            <a:off x="3132734" y="2841955"/>
             <a:ext cx="365760" cy="365760"/>
           </a:xfrm>
           <a:prstGeom prst="rect">
@@ -8952,7 +8958,7 @@
         </p:nvSpPr>
         <p:spPr>
           <a:xfrm>
-            <a:off x="5431536" y="2349094"/>
+            <a:off x="5184648" y="2249424"/>
             <a:ext cx="365760" cy="365760"/>
           </a:xfrm>
           <a:prstGeom prst="ellipse">
@@ -8977,7 +8983,7 @@
         </p:nvSpPr>
         <p:spPr>
           <a:xfrm>
-            <a:off x="5431536" y="2349094"/>
+            <a:off x="5184648" y="2249424"/>
             <a:ext cx="365760" cy="365760"/>
           </a:xfrm>
           <a:prstGeom prst="rect">
@@ -9016,7 +9022,7 @@
         </p:nvSpPr>
         <p:spPr>
           <a:xfrm>
-            <a:off x="2666390" y="4512564"/>
+            <a:off x="2649931" y="4175150"/>
             <a:ext cx="365760" cy="365760"/>
           </a:xfrm>
           <a:prstGeom prst="ellipse">
@@ -9041,7 +9047,7 @@
         </p:nvSpPr>
         <p:spPr>
           <a:xfrm>
-            <a:off x="2666390" y="4512564"/>
+            <a:off x="2649931" y="4175150"/>
             <a:ext cx="365760" cy="365760"/>
           </a:xfrm>
           <a:prstGeom prst="rect">
@@ -9080,7 +9086,7 @@
         </p:nvSpPr>
         <p:spPr>
           <a:xfrm>
-            <a:off x="5168189" y="4262933"/>
+            <a:off x="4943246" y="3878885"/>
             <a:ext cx="365760" cy="365760"/>
           </a:xfrm>
           <a:prstGeom prst="ellipse">
@@ -9105,7 +9111,7 @@
         </p:nvSpPr>
         <p:spPr>
           <a:xfrm>
-            <a:off x="5168189" y="4262933"/>
+            <a:off x="4943246" y="3878885"/>
             <a:ext cx="365760" cy="365760"/>
           </a:xfrm>
           <a:prstGeom prst="rect">
@@ -9144,7 +9150,7 @@
         </p:nvSpPr>
         <p:spPr>
           <a:xfrm>
-            <a:off x="6221578" y="5011826"/>
+            <a:off x="5908853" y="4545482"/>
             <a:ext cx="365760" cy="365760"/>
           </a:xfrm>
           <a:prstGeom prst="ellipse">
@@ -9169,7 +9175,7 @@
         </p:nvSpPr>
         <p:spPr>
           <a:xfrm>
-            <a:off x="6221578" y="5011826"/>
+            <a:off x="5908853" y="4545482"/>
             <a:ext cx="365760" cy="365760"/>
           </a:xfrm>
           <a:prstGeom prst="rect">
@@ -9208,8 +9214,8 @@
         </p:nvSpPr>
         <p:spPr>
           <a:xfrm>
-            <a:off x="8046720" y="1783080"/>
-            <a:ext cx="3657600" cy="274320"/>
+            <a:off x="7818120" y="1691640"/>
+            <a:ext cx="3687775" cy="274320"/>
           </a:xfrm>
           <a:prstGeom prst="rect">
             <a:avLst/>
@@ -9247,7 +9253,7 @@
         </p:nvSpPr>
         <p:spPr>
           <a:xfrm>
-            <a:off x="8046720" y="2194560"/>
+            <a:off x="7818120" y="2130552"/>
             <a:ext cx="329184" cy="329184"/>
           </a:xfrm>
           <a:prstGeom prst="ellipse">
@@ -9272,7 +9278,7 @@
         </p:nvSpPr>
         <p:spPr>
           <a:xfrm>
-            <a:off x="8046720" y="2194560"/>
+            <a:off x="7818120" y="2130552"/>
             <a:ext cx="329184" cy="329184"/>
           </a:xfrm>
           <a:prstGeom prst="rect">
@@ -9311,8 +9317,8 @@
         </p:nvSpPr>
         <p:spPr>
           <a:xfrm>
-            <a:off x="8503920" y="2157984"/>
-            <a:ext cx="3200400" cy="566928"/>
+            <a:off x="8330184" y="2103120"/>
+            <a:ext cx="3175711" cy="536448"/>
           </a:xfrm>
           <a:prstGeom prst="rect">
             <a:avLst/>
@@ -9353,7 +9359,7 @@
                 <a:ea typeface="Hanken Grotesk" pitchFamily="34" charset="-122"/>
                 <a:cs typeface="Hanken Grotesk" pitchFamily="34" charset="-120"/>
               </a:rPr>
-              <a:t>Deserunt mollit anim id est laborum</a:t>
+              <a:t>Deserunt mollit anim id est</a:t>
             </a:r>
             <a:endParaRPr lang="en-US" sz="1350" dirty="0"/>
           </a:p>
@@ -9367,7 +9373,7 @@
         </p:nvSpPr>
         <p:spPr>
           <a:xfrm>
-            <a:off x="8046720" y="2834640"/>
+            <a:off x="7818120" y="2740152"/>
             <a:ext cx="329184" cy="329184"/>
           </a:xfrm>
           <a:prstGeom prst="ellipse">
@@ -9392,7 +9398,7 @@
         </p:nvSpPr>
         <p:spPr>
           <a:xfrm>
-            <a:off x="8046720" y="2834640"/>
+            <a:off x="7818120" y="2740152"/>
             <a:ext cx="329184" cy="329184"/>
           </a:xfrm>
           <a:prstGeom prst="rect">
@@ -9431,8 +9437,8 @@
         </p:nvSpPr>
         <p:spPr>
           <a:xfrm>
-            <a:off x="8503920" y="2798064"/>
-            <a:ext cx="3200400" cy="566928"/>
+            <a:off x="8330184" y="2712720"/>
+            <a:ext cx="3175711" cy="536448"/>
           </a:xfrm>
           <a:prstGeom prst="rect">
             <a:avLst/>
@@ -9473,7 +9479,7 @@
                 <a:ea typeface="Hanken Grotesk" pitchFamily="34" charset="-122"/>
                 <a:cs typeface="Hanken Grotesk" pitchFamily="34" charset="-120"/>
               </a:rPr>
-              <a:t>Nibh euismod gravida lorem ipsum dolor</a:t>
+              <a:t>Nibh euismod gravida lorem ipsum</a:t>
             </a:r>
             <a:endParaRPr lang="en-US" sz="1350" dirty="0"/>
           </a:p>
@@ -9487,7 +9493,7 @@
         </p:nvSpPr>
         <p:spPr>
           <a:xfrm>
-            <a:off x="8046720" y="3474720"/>
+            <a:off x="7818120" y="3349752"/>
             <a:ext cx="329184" cy="329184"/>
           </a:xfrm>
           <a:prstGeom prst="ellipse">
@@ -9512,7 +9518,7 @@
         </p:nvSpPr>
         <p:spPr>
           <a:xfrm>
-            <a:off x="8046720" y="3474720"/>
+            <a:off x="7818120" y="3349752"/>
             <a:ext cx="329184" cy="329184"/>
           </a:xfrm>
           <a:prstGeom prst="rect">
@@ -9551,8 +9557,8 @@
         </p:nvSpPr>
         <p:spPr>
           <a:xfrm>
-            <a:off x="8503920" y="3438144"/>
-            <a:ext cx="3200400" cy="566928"/>
+            <a:off x="8330184" y="3322320"/>
+            <a:ext cx="3175711" cy="536448"/>
           </a:xfrm>
           <a:prstGeom prst="rect">
             <a:avLst/>
@@ -9593,7 +9599,7 @@
                 <a:ea typeface="Hanken Grotesk" pitchFamily="34" charset="-122"/>
                 <a:cs typeface="Hanken Grotesk" pitchFamily="34" charset="-120"/>
               </a:rPr>
-              <a:t>Ex ea commodo consequat duis aute</a:t>
+              <a:t>Ex ea commodo consequat duis</a:t>
             </a:r>
             <a:endParaRPr lang="en-US" sz="1350" dirty="0"/>
           </a:p>
@@ -9607,7 +9613,7 @@
         </p:nvSpPr>
         <p:spPr>
           <a:xfrm>
-            <a:off x="8046720" y="4114800"/>
+            <a:off x="7818120" y="3959352"/>
             <a:ext cx="329184" cy="329184"/>
           </a:xfrm>
           <a:prstGeom prst="ellipse">
@@ -9632,7 +9638,7 @@
         </p:nvSpPr>
         <p:spPr>
           <a:xfrm>
-            <a:off x="8046720" y="4114800"/>
+            <a:off x="7818120" y="3959352"/>
             <a:ext cx="329184" cy="329184"/>
           </a:xfrm>
           <a:prstGeom prst="rect">
@@ -9671,8 +9677,8 @@
         </p:nvSpPr>
         <p:spPr>
           <a:xfrm>
-            <a:off x="8503920" y="4078224"/>
-            <a:ext cx="3200400" cy="566928"/>
+            <a:off x="8330184" y="3931920"/>
+            <a:ext cx="3175711" cy="536448"/>
           </a:xfrm>
           <a:prstGeom prst="rect">
             <a:avLst/>
@@ -9713,7 +9719,7 @@
                 <a:ea typeface="Hanken Grotesk" pitchFamily="34" charset="-122"/>
                 <a:cs typeface="Hanken Grotesk" pitchFamily="34" charset="-120"/>
               </a:rPr>
-              <a:t>Est laborum curabitur pretium tincidunt lacus</a:t>
+              <a:t>Est laborum curabitur pretium tincidunt</a:t>
             </a:r>
             <a:endParaRPr lang="en-US" sz="1350" dirty="0"/>
           </a:p>
@@ -9727,7 +9733,7 @@
         </p:nvSpPr>
         <p:spPr>
           <a:xfrm>
-            <a:off x="8046720" y="4754880"/>
+            <a:off x="7818120" y="4568952"/>
             <a:ext cx="329184" cy="329184"/>
           </a:xfrm>
           <a:prstGeom prst="ellipse">
@@ -9752,7 +9758,7 @@
         </p:nvSpPr>
         <p:spPr>
           <a:xfrm>
-            <a:off x="8046720" y="4754880"/>
+            <a:off x="7818120" y="4568952"/>
             <a:ext cx="329184" cy="329184"/>
           </a:xfrm>
           <a:prstGeom prst="rect">
@@ -9791,8 +9797,8 @@
         </p:nvSpPr>
         <p:spPr>
           <a:xfrm>
-            <a:off x="8503920" y="4718304"/>
-            <a:ext cx="3200400" cy="566928"/>
+            <a:off x="8330184" y="4541520"/>
+            <a:ext cx="3175711" cy="536448"/>
           </a:xfrm>
           <a:prstGeom prst="rect">
             <a:avLst/>
@@ -9833,7 +9839,7 @@
                 <a:ea typeface="Hanken Grotesk" pitchFamily="34" charset="-122"/>
                 <a:cs typeface="Hanken Grotesk" pitchFamily="34" charset="-120"/>
               </a:rPr>
-              <a:t>Ipsum dolor sit amet consectetur adipiscing</a:t>
+              <a:t>Ipsum dolor sit amet consectetur</a:t>
             </a:r>
             <a:endParaRPr lang="en-US" sz="1350" dirty="0"/>
           </a:p>
@@ -9847,7 +9853,7 @@
         </p:nvSpPr>
         <p:spPr>
           <a:xfrm>
-            <a:off x="8046720" y="5394960"/>
+            <a:off x="7818120" y="5178552"/>
             <a:ext cx="329184" cy="329184"/>
           </a:xfrm>
           <a:prstGeom prst="ellipse">
@@ -9872,7 +9878,7 @@
         </p:nvSpPr>
         <p:spPr>
           <a:xfrm>
-            <a:off x="8046720" y="5394960"/>
+            <a:off x="7818120" y="5178552"/>
             <a:ext cx="329184" cy="329184"/>
           </a:xfrm>
           <a:prstGeom prst="rect">
@@ -9911,8 +9917,8 @@
         </p:nvSpPr>
         <p:spPr>
           <a:xfrm>
-            <a:off x="8503920" y="5358384"/>
-            <a:ext cx="3200400" cy="566928"/>
+            <a:off x="8330184" y="5151120"/>
+            <a:ext cx="3175711" cy="536448"/>
           </a:xfrm>
           <a:prstGeom prst="rect">
             <a:avLst/>
@@ -9953,7 +9959,7 @@
                 <a:ea typeface="Hanken Grotesk" pitchFamily="34" charset="-122"/>
                 <a:cs typeface="Hanken Grotesk" pitchFamily="34" charset="-120"/>
               </a:rPr>
-              <a:t>Duis aute irure dolor in reprehenderit</a:t>
+              <a:t>Duis aute irure dolor in</a:t>
             </a:r>
             <a:endParaRPr lang="en-US" sz="1350" dirty="0"/>
           </a:p>
@@ -9999,8 +10005,8 @@
         </p:nvSpPr>
         <p:spPr>
           <a:xfrm>
-            <a:off x="457200" y="384048"/>
-            <a:ext cx="8961120" cy="274320"/>
+            <a:off x="685800" y="502920"/>
+            <a:ext cx="8595360" cy="274320"/>
           </a:xfrm>
           <a:prstGeom prst="rect">
             <a:avLst/>
@@ -10038,8 +10044,8 @@
         </p:nvSpPr>
         <p:spPr>
           <a:xfrm>
-            <a:off x="457200" y="676656"/>
-            <a:ext cx="11274552" cy="868680"/>
+            <a:off x="685800" y="804672"/>
+            <a:ext cx="10820095" cy="566928"/>
           </a:xfrm>
           <a:prstGeom prst="rect">
             <a:avLst/>
@@ -10058,7 +10064,7 @@
               <a:buNone/>
             </a:pPr>
             <a:r>
-              <a:rPr lang="en-US" sz="3000" b="1" dirty="0">
+              <a:rPr lang="en-US" sz="2800" b="1" dirty="0">
                 <a:solidFill>
                   <a:srgbClr val="222731"/>
                 </a:solidFill>
@@ -10066,9 +10072,9 @@
                 <a:ea typeface="Bricolage Grotesque" pitchFamily="34" charset="-122"/>
                 <a:cs typeface="Bricolage Grotesque" pitchFamily="34" charset="-120"/>
               </a:rPr>
-              <a:t>Ex ea commodo consequat duis aute irure dolor in</a:t>
-            </a:r>
-            <a:endParaRPr lang="en-US" sz="3000" dirty="0"/>
+              <a:t>Ex ea commodo consequat duis aute</a:t>
+            </a:r>
+            <a:endParaRPr lang="en-US" sz="2800" dirty="0"/>
           </a:p>
         </p:txBody>
       </p:sp>
@@ -10080,7 +10086,7 @@
         </p:nvSpPr>
         <p:spPr>
           <a:xfrm>
-            <a:off x="457200" y="6400800"/>
+            <a:off x="685800" y="6400800"/>
             <a:ext cx="4389120" cy="256032"/>
           </a:xfrm>
           <a:prstGeom prst="rect">
@@ -10120,7 +10126,7 @@
         <p:spPr>
           <a:xfrm>
             <a:off x="4937760" y="6400800"/>
-            <a:ext cx="5943600" cy="256032"/>
+            <a:ext cx="5790895" cy="256032"/>
           </a:xfrm>
           <a:prstGeom prst="rect">
             <a:avLst/>
@@ -10158,7 +10164,7 @@
         </p:nvSpPr>
         <p:spPr>
           <a:xfrm>
-            <a:off x="11091672" y="6400800"/>
+            <a:off x="10865815" y="6400800"/>
             <a:ext cx="640080" cy="256032"/>
           </a:xfrm>
           <a:prstGeom prst="rect">
@@ -10197,12 +10203,12 @@
         </p:nvSpPr>
         <p:spPr>
           <a:xfrm>
-            <a:off x="457200" y="1783080"/>
-            <a:ext cx="11277295" cy="1298448"/>
+            <a:off x="685800" y="1691640"/>
+            <a:ext cx="10820095" cy="1143000"/>
           </a:xfrm>
           <a:prstGeom prst="roundRect">
             <a:avLst>
-              <a:gd name="adj" fmla="val 8451"/>
+              <a:gd name="adj" fmla="val 9600"/>
             </a:avLst>
           </a:prstGeom>
           <a:solidFill>
@@ -10224,7 +10230,7 @@
         </p:nvSpPr>
         <p:spPr>
           <a:xfrm>
-            <a:off x="731520" y="2057400"/>
+            <a:off x="1051560" y="2052828"/>
             <a:ext cx="420624" cy="420624"/>
           </a:xfrm>
           <a:prstGeom prst="ellipse">
@@ -10249,7 +10255,7 @@
         </p:nvSpPr>
         <p:spPr>
           <a:xfrm>
-            <a:off x="731520" y="2057400"/>
+            <a:off x="1051560" y="2052828"/>
             <a:ext cx="420624" cy="420624"/>
           </a:xfrm>
           <a:prstGeom prst="rect">
@@ -10288,8 +10294,8 @@
         </p:nvSpPr>
         <p:spPr>
           <a:xfrm>
-            <a:off x="1371600" y="2002536"/>
-            <a:ext cx="7498080" cy="365760"/>
+            <a:off x="1737360" y="1929384"/>
+            <a:ext cx="6842455" cy="329184"/>
           </a:xfrm>
           <a:prstGeom prst="rect">
             <a:avLst/>
@@ -10313,7 +10319,7 @@
                 <a:ea typeface="Bricolage Grotesque" pitchFamily="34" charset="-122"/>
                 <a:cs typeface="Bricolage Grotesque" pitchFamily="34" charset="-120"/>
               </a:rPr>
-              <a:t>Labore et dolore magna aliqua ut</a:t>
+              <a:t>Labore et dolore magna aliqua</a:t>
             </a:r>
             <a:endParaRPr lang="en-US" sz="1700" dirty="0"/>
           </a:p>
@@ -10327,8 +10333,8 @@
         </p:nvSpPr>
         <p:spPr>
           <a:xfrm>
-            <a:off x="1371600" y="2404872"/>
-            <a:ext cx="7680960" cy="594360"/>
+            <a:off x="1737360" y="2295144"/>
+            <a:ext cx="6842455" cy="411480"/>
           </a:xfrm>
           <a:prstGeom prst="rect">
             <a:avLst/>
@@ -10352,7 +10358,7 @@
                 <a:ea typeface="Hanken Grotesk" pitchFamily="34" charset="-122"/>
                 <a:cs typeface="Hanken Grotesk" pitchFamily="34" charset="-120"/>
               </a:rPr>
-              <a:t>Fugiat nulla pariatur excepteur sint occaecat cupidatat non proident sunt in culpa qui officia deserunt mollit anim id est laborum curabitur pretium.</a:t>
+              <a:t>Fugiat nulla pariatur excepteur sint occaecat cupidatat non proident sunt in culpa qui officia deserunt.</a:t>
             </a:r>
             <a:endParaRPr lang="en-US" sz="1350" dirty="0"/>
           </a:p>
@@ -10366,7 +10372,7 @@
         </p:nvSpPr>
         <p:spPr>
           <a:xfrm>
-            <a:off x="9357055" y="2258568"/>
+            <a:off x="9037015" y="2089404"/>
             <a:ext cx="2103120" cy="347472"/>
           </a:xfrm>
           <a:prstGeom prst="roundRect">
@@ -10393,7 +10399,7 @@
         </p:nvSpPr>
         <p:spPr>
           <a:xfrm>
-            <a:off x="9357055" y="2258568"/>
+            <a:off x="9037015" y="2089404"/>
             <a:ext cx="2103120" cy="347472"/>
           </a:xfrm>
           <a:prstGeom prst="rect">
@@ -10432,12 +10438,12 @@
         </p:nvSpPr>
         <p:spPr>
           <a:xfrm>
-            <a:off x="457200" y="3246120"/>
-            <a:ext cx="11277295" cy="1298448"/>
+            <a:off x="685800" y="3154680"/>
+            <a:ext cx="10820095" cy="1143000"/>
           </a:xfrm>
           <a:prstGeom prst="roundRect">
             <a:avLst>
-              <a:gd name="adj" fmla="val 8451"/>
+              <a:gd name="adj" fmla="val 9600"/>
             </a:avLst>
           </a:prstGeom>
           <a:solidFill>
@@ -10459,7 +10465,7 @@
         </p:nvSpPr>
         <p:spPr>
           <a:xfrm>
-            <a:off x="731520" y="3520440"/>
+            <a:off x="1051560" y="3515868"/>
             <a:ext cx="420624" cy="420624"/>
           </a:xfrm>
           <a:prstGeom prst="ellipse">
@@ -10484,7 +10490,7 @@
         </p:nvSpPr>
         <p:spPr>
           <a:xfrm>
-            <a:off x="731520" y="3520440"/>
+            <a:off x="1051560" y="3515868"/>
             <a:ext cx="420624" cy="420624"/>
           </a:xfrm>
           <a:prstGeom prst="rect">
@@ -10523,8 +10529,8 @@
         </p:nvSpPr>
         <p:spPr>
           <a:xfrm>
-            <a:off x="1371600" y="3465576"/>
-            <a:ext cx="7498080" cy="365760"/>
+            <a:off x="1737360" y="3392424"/>
+            <a:ext cx="6842455" cy="329184"/>
           </a:xfrm>
           <a:prstGeom prst="rect">
             <a:avLst/>
@@ -10548,7 +10554,7 @@
                 <a:ea typeface="Bricolage Grotesque" pitchFamily="34" charset="-122"/>
                 <a:cs typeface="Bricolage Grotesque" pitchFamily="34" charset="-120"/>
               </a:rPr>
-              <a:t>In voluptate velit esse cillum dolore</a:t>
+              <a:t>In voluptate velit esse cillum</a:t>
             </a:r>
             <a:endParaRPr lang="en-US" sz="1700" dirty="0"/>
           </a:p>
@@ -10562,8 +10568,8 @@
         </p:nvSpPr>
         <p:spPr>
           <a:xfrm>
-            <a:off x="1371600" y="3867912"/>
-            <a:ext cx="7680960" cy="594360"/>
+            <a:off x="1737360" y="3758184"/>
+            <a:ext cx="6842455" cy="411480"/>
           </a:xfrm>
           <a:prstGeom prst="rect">
             <a:avLst/>
@@ -10587,7 +10593,7 @@
                 <a:ea typeface="Hanken Grotesk" pitchFamily="34" charset="-122"/>
                 <a:cs typeface="Hanken Grotesk" pitchFamily="34" charset="-120"/>
               </a:rPr>
-              <a:t>Felis sollicitudin mauris integer in mauris eu nibh euismod gravida lorem ipsum dolor sit amet consectetur adipiscing elit sed do eiusmod tempor.</a:t>
+              <a:t>Felis sollicitudin mauris integer in mauris eu nibh euismod gravida lorem ipsum dolor sit amet.</a:t>
             </a:r>
             <a:endParaRPr lang="en-US" sz="1350" dirty="0"/>
           </a:p>
@@ -10601,7 +10607,7 @@
         </p:nvSpPr>
         <p:spPr>
           <a:xfrm>
-            <a:off x="9357055" y="3721608"/>
+            <a:off x="9037015" y="3552444"/>
             <a:ext cx="2103120" cy="347472"/>
           </a:xfrm>
           <a:prstGeom prst="roundRect">
@@ -10628,7 +10634,7 @@
         </p:nvSpPr>
         <p:spPr>
           <a:xfrm>
-            <a:off x="9357055" y="3721608"/>
+            <a:off x="9037015" y="3552444"/>
             <a:ext cx="2103120" cy="347472"/>
           </a:xfrm>
           <a:prstGeom prst="rect">
@@ -10667,12 +10673,12 @@
         </p:nvSpPr>
         <p:spPr>
           <a:xfrm>
-            <a:off x="457200" y="4709160"/>
-            <a:ext cx="11277295" cy="1298448"/>
+            <a:off x="685800" y="4617720"/>
+            <a:ext cx="10820095" cy="1143000"/>
           </a:xfrm>
           <a:prstGeom prst="roundRect">
             <a:avLst>
-              <a:gd name="adj" fmla="val 8451"/>
+              <a:gd name="adj" fmla="val 9600"/>
             </a:avLst>
           </a:prstGeom>
           <a:solidFill>
@@ -10694,7 +10700,7 @@
         </p:nvSpPr>
         <p:spPr>
           <a:xfrm>
-            <a:off x="731520" y="4983480"/>
+            <a:off x="1051560" y="4978908"/>
             <a:ext cx="420624" cy="420624"/>
           </a:xfrm>
           <a:prstGeom prst="ellipse">
@@ -10719,7 +10725,7 @@
         </p:nvSpPr>
         <p:spPr>
           <a:xfrm>
-            <a:off x="731520" y="4983480"/>
+            <a:off x="1051560" y="4978908"/>
             <a:ext cx="420624" cy="420624"/>
           </a:xfrm>
           <a:prstGeom prst="rect">
@@ -10758,8 +10764,8 @@
         </p:nvSpPr>
         <p:spPr>
           <a:xfrm>
-            <a:off x="1371600" y="4928616"/>
-            <a:ext cx="7498080" cy="365760"/>
+            <a:off x="1737360" y="4855464"/>
+            <a:ext cx="6842455" cy="329184"/>
           </a:xfrm>
           <a:prstGeom prst="rect">
             <a:avLst/>
@@ -10783,7 +10789,7 @@
                 <a:ea typeface="Bricolage Grotesque" pitchFamily="34" charset="-122"/>
                 <a:cs typeface="Bricolage Grotesque" pitchFamily="34" charset="-120"/>
               </a:rPr>
-              <a:t>Pretium tincidunt lacus nulla gravida orci</a:t>
+              <a:t>Pretium tincidunt lacus nulla gravida</a:t>
             </a:r>
             <a:endParaRPr lang="en-US" sz="1700" dirty="0"/>
           </a:p>
@@ -10797,8 +10803,8 @@
         </p:nvSpPr>
         <p:spPr>
           <a:xfrm>
-            <a:off x="1371600" y="5330952"/>
-            <a:ext cx="7680960" cy="594360"/>
+            <a:off x="1737360" y="5221224"/>
+            <a:ext cx="6842455" cy="411480"/>
           </a:xfrm>
           <a:prstGeom prst="rect">
             <a:avLst/>
@@ -10822,7 +10828,7 @@
                 <a:ea typeface="Hanken Grotesk" pitchFamily="34" charset="-122"/>
                 <a:cs typeface="Hanken Grotesk" pitchFamily="34" charset="-120"/>
               </a:rPr>
-              <a:t>Ex ea commodo consequat duis aute irure dolor in reprehenderit in voluptate velit esse cillum dolore eu fugiat nulla pariatur excepteur sint.</a:t>
+              <a:t>Ex ea commodo consequat duis aute irure dolor in reprehenderit in voluptate velit esse cillum.</a:t>
             </a:r>
             <a:endParaRPr lang="en-US" sz="1350" dirty="0"/>
           </a:p>
@@ -10836,7 +10842,7 @@
         </p:nvSpPr>
         <p:spPr>
           <a:xfrm>
-            <a:off x="9357055" y="5184648"/>
+            <a:off x="9037015" y="5015484"/>
             <a:ext cx="2103120" cy="347472"/>
           </a:xfrm>
           <a:prstGeom prst="roundRect">
@@ -10863,7 +10869,7 @@
         </p:nvSpPr>
         <p:spPr>
           <a:xfrm>
-            <a:off x="9357055" y="5184648"/>
+            <a:off x="9037015" y="5015484"/>
             <a:ext cx="2103120" cy="347472"/>
           </a:xfrm>
           <a:prstGeom prst="rect">
